--- a/static/images/icon graphic for website.pptx
+++ b/static/images/icon graphic for website.pptx
@@ -7,6 +7,7 @@
   <p:sldIdLst>
     <p:sldId id="257" r:id="rId2"/>
     <p:sldId id="258" r:id="rId3"/>
+    <p:sldId id="259" r:id="rId4"/>
   </p:sldIdLst>
   <p:sldSz cx="12192000" cy="6858000"/>
   <p:notesSz cx="6858000" cy="9144000"/>
@@ -1584,6 +1585,753 @@
   <dgm:styleLbl name="fgShp">
     <dgm:fillClrLst meth="repeat">
       <a:schemeClr val="accent1">
+        <a:tint val="60000"/>
+      </a:schemeClr>
+    </dgm:fillClrLst>
+    <dgm:linClrLst meth="repeat">
+      <a:schemeClr val="lt1"/>
+    </dgm:linClrLst>
+    <dgm:effectClrLst/>
+    <dgm:txLinClrLst/>
+    <dgm:txFillClrLst meth="repeat">
+      <a:schemeClr val="dk1"/>
+    </dgm:txFillClrLst>
+    <dgm:txEffectClrLst/>
+  </dgm:styleLbl>
+  <dgm:styleLbl name="revTx">
+    <dgm:fillClrLst meth="repeat">
+      <a:schemeClr val="lt1">
+        <a:alpha val="0"/>
+      </a:schemeClr>
+    </dgm:fillClrLst>
+    <dgm:linClrLst meth="repeat">
+      <a:schemeClr val="dk1">
+        <a:alpha val="0"/>
+      </a:schemeClr>
+    </dgm:linClrLst>
+    <dgm:effectClrLst/>
+    <dgm:txLinClrLst/>
+    <dgm:txFillClrLst meth="repeat">
+      <a:schemeClr val="tx1"/>
+    </dgm:txFillClrLst>
+    <dgm:txEffectClrLst/>
+  </dgm:styleLbl>
+</dgm:colorsDef>
+</file>
+
+<file path=ppt/diagrams/colors3.xml><?xml version="1.0" encoding="utf-8"?>
+<dgm:colorsDef xmlns:dgm="http://schemas.openxmlformats.org/drawingml/2006/diagram" xmlns:a="http://schemas.openxmlformats.org/drawingml/2006/main" uniqueId="urn:microsoft.com/office/officeart/2005/8/colors/accent2_2">
+  <dgm:title val=""/>
+  <dgm:desc val=""/>
+  <dgm:catLst>
+    <dgm:cat type="accent2" pri="11200"/>
+  </dgm:catLst>
+  <dgm:styleLbl name="node0">
+    <dgm:fillClrLst meth="repeat">
+      <a:schemeClr val="accent2"/>
+    </dgm:fillClrLst>
+    <dgm:linClrLst meth="repeat">
+      <a:schemeClr val="lt1"/>
+    </dgm:linClrLst>
+    <dgm:effectClrLst/>
+    <dgm:txLinClrLst/>
+    <dgm:txFillClrLst/>
+    <dgm:txEffectClrLst/>
+  </dgm:styleLbl>
+  <dgm:styleLbl name="node1">
+    <dgm:fillClrLst meth="repeat">
+      <a:schemeClr val="accent2"/>
+    </dgm:fillClrLst>
+    <dgm:linClrLst meth="repeat">
+      <a:schemeClr val="lt1"/>
+    </dgm:linClrLst>
+    <dgm:effectClrLst/>
+    <dgm:txLinClrLst/>
+    <dgm:txFillClrLst/>
+    <dgm:txEffectClrLst/>
+  </dgm:styleLbl>
+  <dgm:styleLbl name="alignNode1">
+    <dgm:fillClrLst meth="repeat">
+      <a:schemeClr val="accent2"/>
+    </dgm:fillClrLst>
+    <dgm:linClrLst meth="repeat">
+      <a:schemeClr val="accent2"/>
+    </dgm:linClrLst>
+    <dgm:effectClrLst/>
+    <dgm:txLinClrLst/>
+    <dgm:txFillClrLst/>
+    <dgm:txEffectClrLst/>
+  </dgm:styleLbl>
+  <dgm:styleLbl name="lnNode1">
+    <dgm:fillClrLst meth="repeat">
+      <a:schemeClr val="accent2"/>
+    </dgm:fillClrLst>
+    <dgm:linClrLst meth="repeat">
+      <a:schemeClr val="lt1"/>
+    </dgm:linClrLst>
+    <dgm:effectClrLst/>
+    <dgm:txLinClrLst/>
+    <dgm:txFillClrLst/>
+    <dgm:txEffectClrLst/>
+  </dgm:styleLbl>
+  <dgm:styleLbl name="vennNode1">
+    <dgm:fillClrLst meth="repeat">
+      <a:schemeClr val="accent2">
+        <a:alpha val="50000"/>
+      </a:schemeClr>
+    </dgm:fillClrLst>
+    <dgm:linClrLst meth="repeat">
+      <a:schemeClr val="lt1"/>
+    </dgm:linClrLst>
+    <dgm:effectClrLst/>
+    <dgm:txLinClrLst/>
+    <dgm:txFillClrLst/>
+    <dgm:txEffectClrLst/>
+  </dgm:styleLbl>
+  <dgm:styleLbl name="node2">
+    <dgm:fillClrLst meth="repeat">
+      <a:schemeClr val="accent2"/>
+    </dgm:fillClrLst>
+    <dgm:linClrLst meth="repeat">
+      <a:schemeClr val="lt1"/>
+    </dgm:linClrLst>
+    <dgm:effectClrLst/>
+    <dgm:txLinClrLst/>
+    <dgm:txFillClrLst/>
+    <dgm:txEffectClrLst/>
+  </dgm:styleLbl>
+  <dgm:styleLbl name="node3">
+    <dgm:fillClrLst meth="repeat">
+      <a:schemeClr val="accent2"/>
+    </dgm:fillClrLst>
+    <dgm:linClrLst meth="repeat">
+      <a:schemeClr val="lt1"/>
+    </dgm:linClrLst>
+    <dgm:effectClrLst/>
+    <dgm:txLinClrLst/>
+    <dgm:txFillClrLst/>
+    <dgm:txEffectClrLst/>
+  </dgm:styleLbl>
+  <dgm:styleLbl name="node4">
+    <dgm:fillClrLst meth="repeat">
+      <a:schemeClr val="accent2"/>
+    </dgm:fillClrLst>
+    <dgm:linClrLst meth="repeat">
+      <a:schemeClr val="lt1"/>
+    </dgm:linClrLst>
+    <dgm:effectClrLst/>
+    <dgm:txLinClrLst/>
+    <dgm:txFillClrLst/>
+    <dgm:txEffectClrLst/>
+  </dgm:styleLbl>
+  <dgm:styleLbl name="fgImgPlace1">
+    <dgm:fillClrLst meth="repeat">
+      <a:schemeClr val="accent2">
+        <a:tint val="50000"/>
+      </a:schemeClr>
+    </dgm:fillClrLst>
+    <dgm:linClrLst meth="repeat">
+      <a:schemeClr val="lt1"/>
+    </dgm:linClrLst>
+    <dgm:effectClrLst/>
+    <dgm:txLinClrLst/>
+    <dgm:txFillClrLst meth="repeat">
+      <a:schemeClr val="lt1"/>
+    </dgm:txFillClrLst>
+    <dgm:txEffectClrLst/>
+  </dgm:styleLbl>
+  <dgm:styleLbl name="alignImgPlace1">
+    <dgm:fillClrLst meth="repeat">
+      <a:schemeClr val="accent2">
+        <a:tint val="50000"/>
+      </a:schemeClr>
+    </dgm:fillClrLst>
+    <dgm:linClrLst meth="repeat">
+      <a:schemeClr val="lt1"/>
+    </dgm:linClrLst>
+    <dgm:effectClrLst/>
+    <dgm:txLinClrLst/>
+    <dgm:txFillClrLst meth="repeat">
+      <a:schemeClr val="lt1"/>
+    </dgm:txFillClrLst>
+    <dgm:txEffectClrLst/>
+  </dgm:styleLbl>
+  <dgm:styleLbl name="bgImgPlace1">
+    <dgm:fillClrLst meth="repeat">
+      <a:schemeClr val="accent2">
+        <a:tint val="50000"/>
+      </a:schemeClr>
+    </dgm:fillClrLst>
+    <dgm:linClrLst meth="repeat">
+      <a:schemeClr val="lt1"/>
+    </dgm:linClrLst>
+    <dgm:effectClrLst/>
+    <dgm:txLinClrLst/>
+    <dgm:txFillClrLst meth="repeat">
+      <a:schemeClr val="lt1"/>
+    </dgm:txFillClrLst>
+    <dgm:txEffectClrLst/>
+  </dgm:styleLbl>
+  <dgm:styleLbl name="sibTrans2D1">
+    <dgm:fillClrLst meth="repeat">
+      <a:schemeClr val="accent2">
+        <a:tint val="60000"/>
+      </a:schemeClr>
+    </dgm:fillClrLst>
+    <dgm:linClrLst meth="repeat">
+      <a:schemeClr val="accent2">
+        <a:tint val="60000"/>
+      </a:schemeClr>
+    </dgm:linClrLst>
+    <dgm:effectClrLst/>
+    <dgm:txLinClrLst/>
+    <dgm:txFillClrLst/>
+    <dgm:txEffectClrLst/>
+  </dgm:styleLbl>
+  <dgm:styleLbl name="fgSibTrans2D1">
+    <dgm:fillClrLst meth="repeat">
+      <a:schemeClr val="accent2">
+        <a:tint val="60000"/>
+      </a:schemeClr>
+    </dgm:fillClrLst>
+    <dgm:linClrLst meth="repeat">
+      <a:schemeClr val="accent2">
+        <a:tint val="60000"/>
+      </a:schemeClr>
+    </dgm:linClrLst>
+    <dgm:effectClrLst/>
+    <dgm:txLinClrLst/>
+    <dgm:txFillClrLst/>
+    <dgm:txEffectClrLst/>
+  </dgm:styleLbl>
+  <dgm:styleLbl name="bgSibTrans2D1">
+    <dgm:fillClrLst meth="repeat">
+      <a:schemeClr val="accent2">
+        <a:tint val="60000"/>
+      </a:schemeClr>
+    </dgm:fillClrLst>
+    <dgm:linClrLst meth="repeat">
+      <a:schemeClr val="accent2">
+        <a:tint val="60000"/>
+      </a:schemeClr>
+    </dgm:linClrLst>
+    <dgm:effectClrLst/>
+    <dgm:txLinClrLst/>
+    <dgm:txFillClrLst/>
+    <dgm:txEffectClrLst/>
+  </dgm:styleLbl>
+  <dgm:styleLbl name="sibTrans1D1">
+    <dgm:fillClrLst meth="repeat">
+      <a:schemeClr val="accent2"/>
+    </dgm:fillClrLst>
+    <dgm:linClrLst meth="repeat">
+      <a:schemeClr val="accent2"/>
+    </dgm:linClrLst>
+    <dgm:effectClrLst/>
+    <dgm:txLinClrLst/>
+    <dgm:txFillClrLst meth="repeat">
+      <a:schemeClr val="tx1"/>
+    </dgm:txFillClrLst>
+    <dgm:txEffectClrLst/>
+  </dgm:styleLbl>
+  <dgm:styleLbl name="callout">
+    <dgm:fillClrLst meth="repeat">
+      <a:schemeClr val="accent2"/>
+    </dgm:fillClrLst>
+    <dgm:linClrLst meth="repeat">
+      <a:schemeClr val="accent2">
+        <a:tint val="50000"/>
+      </a:schemeClr>
+    </dgm:linClrLst>
+    <dgm:effectClrLst/>
+    <dgm:txLinClrLst/>
+    <dgm:txFillClrLst meth="repeat">
+      <a:schemeClr val="tx1"/>
+    </dgm:txFillClrLst>
+    <dgm:txEffectClrLst/>
+  </dgm:styleLbl>
+  <dgm:styleLbl name="asst0">
+    <dgm:fillClrLst meth="repeat">
+      <a:schemeClr val="accent2"/>
+    </dgm:fillClrLst>
+    <dgm:linClrLst meth="repeat">
+      <a:schemeClr val="lt1"/>
+    </dgm:linClrLst>
+    <dgm:effectClrLst/>
+    <dgm:txLinClrLst/>
+    <dgm:txFillClrLst/>
+    <dgm:txEffectClrLst/>
+  </dgm:styleLbl>
+  <dgm:styleLbl name="asst1">
+    <dgm:fillClrLst meth="repeat">
+      <a:schemeClr val="accent2"/>
+    </dgm:fillClrLst>
+    <dgm:linClrLst meth="repeat">
+      <a:schemeClr val="lt1"/>
+    </dgm:linClrLst>
+    <dgm:effectClrLst/>
+    <dgm:txLinClrLst/>
+    <dgm:txFillClrLst/>
+    <dgm:txEffectClrLst/>
+  </dgm:styleLbl>
+  <dgm:styleLbl name="asst2">
+    <dgm:fillClrLst meth="repeat">
+      <a:schemeClr val="accent2"/>
+    </dgm:fillClrLst>
+    <dgm:linClrLst meth="repeat">
+      <a:schemeClr val="lt1"/>
+    </dgm:linClrLst>
+    <dgm:effectClrLst/>
+    <dgm:txLinClrLst/>
+    <dgm:txFillClrLst/>
+    <dgm:txEffectClrLst/>
+  </dgm:styleLbl>
+  <dgm:styleLbl name="asst3">
+    <dgm:fillClrLst meth="repeat">
+      <a:schemeClr val="accent2"/>
+    </dgm:fillClrLst>
+    <dgm:linClrLst meth="repeat">
+      <a:schemeClr val="lt1"/>
+    </dgm:linClrLst>
+    <dgm:effectClrLst/>
+    <dgm:txLinClrLst/>
+    <dgm:txFillClrLst/>
+    <dgm:txEffectClrLst/>
+  </dgm:styleLbl>
+  <dgm:styleLbl name="asst4">
+    <dgm:fillClrLst meth="repeat">
+      <a:schemeClr val="accent2"/>
+    </dgm:fillClrLst>
+    <dgm:linClrLst meth="repeat">
+      <a:schemeClr val="lt1"/>
+    </dgm:linClrLst>
+    <dgm:effectClrLst/>
+    <dgm:txLinClrLst/>
+    <dgm:txFillClrLst/>
+    <dgm:txEffectClrLst/>
+  </dgm:styleLbl>
+  <dgm:styleLbl name="parChTrans2D1">
+    <dgm:fillClrLst meth="repeat">
+      <a:schemeClr val="accent2">
+        <a:tint val="60000"/>
+      </a:schemeClr>
+    </dgm:fillClrLst>
+    <dgm:linClrLst meth="repeat">
+      <a:schemeClr val="accent2">
+        <a:tint val="60000"/>
+      </a:schemeClr>
+    </dgm:linClrLst>
+    <dgm:effectClrLst/>
+    <dgm:txLinClrLst/>
+    <dgm:txFillClrLst meth="repeat">
+      <a:schemeClr val="lt1"/>
+    </dgm:txFillClrLst>
+    <dgm:txEffectClrLst/>
+  </dgm:styleLbl>
+  <dgm:styleLbl name="parChTrans2D2">
+    <dgm:fillClrLst meth="repeat">
+      <a:schemeClr val="accent2"/>
+    </dgm:fillClrLst>
+    <dgm:linClrLst meth="repeat">
+      <a:schemeClr val="accent2"/>
+    </dgm:linClrLst>
+    <dgm:effectClrLst/>
+    <dgm:txLinClrLst/>
+    <dgm:txFillClrLst meth="repeat">
+      <a:schemeClr val="lt1"/>
+    </dgm:txFillClrLst>
+    <dgm:txEffectClrLst/>
+  </dgm:styleLbl>
+  <dgm:styleLbl name="parChTrans2D3">
+    <dgm:fillClrLst meth="repeat">
+      <a:schemeClr val="accent2"/>
+    </dgm:fillClrLst>
+    <dgm:linClrLst meth="repeat">
+      <a:schemeClr val="accent2"/>
+    </dgm:linClrLst>
+    <dgm:effectClrLst/>
+    <dgm:txLinClrLst/>
+    <dgm:txFillClrLst meth="repeat">
+      <a:schemeClr val="lt1"/>
+    </dgm:txFillClrLst>
+    <dgm:txEffectClrLst/>
+  </dgm:styleLbl>
+  <dgm:styleLbl name="parChTrans2D4">
+    <dgm:fillClrLst meth="repeat">
+      <a:schemeClr val="accent2"/>
+    </dgm:fillClrLst>
+    <dgm:linClrLst meth="repeat">
+      <a:schemeClr val="accent2"/>
+    </dgm:linClrLst>
+    <dgm:effectClrLst/>
+    <dgm:txLinClrLst/>
+    <dgm:txFillClrLst meth="repeat">
+      <a:schemeClr val="lt1"/>
+    </dgm:txFillClrLst>
+    <dgm:txEffectClrLst/>
+  </dgm:styleLbl>
+  <dgm:styleLbl name="parChTrans1D1">
+    <dgm:fillClrLst meth="repeat">
+      <a:schemeClr val="accent2"/>
+    </dgm:fillClrLst>
+    <dgm:linClrLst meth="repeat">
+      <a:schemeClr val="accent2">
+        <a:shade val="60000"/>
+      </a:schemeClr>
+    </dgm:linClrLst>
+    <dgm:effectClrLst/>
+    <dgm:txLinClrLst/>
+    <dgm:txFillClrLst meth="repeat">
+      <a:schemeClr val="tx1"/>
+    </dgm:txFillClrLst>
+    <dgm:txEffectClrLst/>
+  </dgm:styleLbl>
+  <dgm:styleLbl name="parChTrans1D2">
+    <dgm:fillClrLst meth="repeat">
+      <a:schemeClr val="accent2"/>
+    </dgm:fillClrLst>
+    <dgm:linClrLst meth="repeat">
+      <a:schemeClr val="accent2">
+        <a:shade val="60000"/>
+      </a:schemeClr>
+    </dgm:linClrLst>
+    <dgm:effectClrLst/>
+    <dgm:txLinClrLst/>
+    <dgm:txFillClrLst meth="repeat">
+      <a:schemeClr val="tx1"/>
+    </dgm:txFillClrLst>
+    <dgm:txEffectClrLst/>
+  </dgm:styleLbl>
+  <dgm:styleLbl name="parChTrans1D3">
+    <dgm:fillClrLst meth="repeat">
+      <a:schemeClr val="accent2"/>
+    </dgm:fillClrLst>
+    <dgm:linClrLst meth="repeat">
+      <a:schemeClr val="accent2">
+        <a:shade val="80000"/>
+      </a:schemeClr>
+    </dgm:linClrLst>
+    <dgm:effectClrLst/>
+    <dgm:txLinClrLst/>
+    <dgm:txFillClrLst meth="repeat">
+      <a:schemeClr val="tx1"/>
+    </dgm:txFillClrLst>
+    <dgm:txEffectClrLst/>
+  </dgm:styleLbl>
+  <dgm:styleLbl name="parChTrans1D4">
+    <dgm:fillClrLst meth="repeat">
+      <a:schemeClr val="accent2"/>
+    </dgm:fillClrLst>
+    <dgm:linClrLst meth="repeat">
+      <a:schemeClr val="accent2">
+        <a:shade val="80000"/>
+      </a:schemeClr>
+    </dgm:linClrLst>
+    <dgm:effectClrLst/>
+    <dgm:txLinClrLst/>
+    <dgm:txFillClrLst meth="repeat">
+      <a:schemeClr val="tx1"/>
+    </dgm:txFillClrLst>
+    <dgm:txEffectClrLst/>
+  </dgm:styleLbl>
+  <dgm:styleLbl name="fgAcc1">
+    <dgm:fillClrLst meth="repeat">
+      <a:schemeClr val="lt1">
+        <a:alpha val="90000"/>
+      </a:schemeClr>
+    </dgm:fillClrLst>
+    <dgm:linClrLst meth="repeat">
+      <a:schemeClr val="accent2"/>
+    </dgm:linClrLst>
+    <dgm:effectClrLst/>
+    <dgm:txLinClrLst/>
+    <dgm:txFillClrLst meth="repeat">
+      <a:schemeClr val="dk1"/>
+    </dgm:txFillClrLst>
+    <dgm:txEffectClrLst/>
+  </dgm:styleLbl>
+  <dgm:styleLbl name="conFgAcc1">
+    <dgm:fillClrLst meth="repeat">
+      <a:schemeClr val="lt1">
+        <a:alpha val="90000"/>
+      </a:schemeClr>
+    </dgm:fillClrLst>
+    <dgm:linClrLst meth="repeat">
+      <a:schemeClr val="accent2"/>
+    </dgm:linClrLst>
+    <dgm:effectClrLst/>
+    <dgm:txLinClrLst/>
+    <dgm:txFillClrLst meth="repeat">
+      <a:schemeClr val="dk1"/>
+    </dgm:txFillClrLst>
+    <dgm:txEffectClrLst/>
+  </dgm:styleLbl>
+  <dgm:styleLbl name="alignAcc1">
+    <dgm:fillClrLst meth="repeat">
+      <a:schemeClr val="lt1">
+        <a:alpha val="90000"/>
+      </a:schemeClr>
+    </dgm:fillClrLst>
+    <dgm:linClrLst meth="repeat">
+      <a:schemeClr val="accent2"/>
+    </dgm:linClrLst>
+    <dgm:effectClrLst/>
+    <dgm:txLinClrLst/>
+    <dgm:txFillClrLst meth="repeat">
+      <a:schemeClr val="dk1"/>
+    </dgm:txFillClrLst>
+    <dgm:txEffectClrLst/>
+  </dgm:styleLbl>
+  <dgm:styleLbl name="trAlignAcc1">
+    <dgm:fillClrLst meth="repeat">
+      <a:schemeClr val="lt1">
+        <a:alpha val="40000"/>
+      </a:schemeClr>
+    </dgm:fillClrLst>
+    <dgm:linClrLst meth="repeat">
+      <a:schemeClr val="accent2"/>
+    </dgm:linClrLst>
+    <dgm:effectClrLst/>
+    <dgm:txLinClrLst/>
+    <dgm:txFillClrLst meth="repeat">
+      <a:schemeClr val="dk1"/>
+    </dgm:txFillClrLst>
+    <dgm:txEffectClrLst/>
+  </dgm:styleLbl>
+  <dgm:styleLbl name="bgAcc1">
+    <dgm:fillClrLst meth="repeat">
+      <a:schemeClr val="lt1">
+        <a:alpha val="90000"/>
+      </a:schemeClr>
+    </dgm:fillClrLst>
+    <dgm:linClrLst meth="repeat">
+      <a:schemeClr val="accent2"/>
+    </dgm:linClrLst>
+    <dgm:effectClrLst/>
+    <dgm:txLinClrLst/>
+    <dgm:txFillClrLst meth="repeat">
+      <a:schemeClr val="dk1"/>
+    </dgm:txFillClrLst>
+    <dgm:txEffectClrLst/>
+  </dgm:styleLbl>
+  <dgm:styleLbl name="solidFgAcc1">
+    <dgm:fillClrLst meth="repeat">
+      <a:schemeClr val="lt1"/>
+    </dgm:fillClrLst>
+    <dgm:linClrLst meth="repeat">
+      <a:schemeClr val="accent2"/>
+    </dgm:linClrLst>
+    <dgm:effectClrLst/>
+    <dgm:txLinClrLst/>
+    <dgm:txFillClrLst meth="repeat">
+      <a:schemeClr val="dk1"/>
+    </dgm:txFillClrLst>
+    <dgm:txEffectClrLst/>
+  </dgm:styleLbl>
+  <dgm:styleLbl name="solidAlignAcc1">
+    <dgm:fillClrLst meth="repeat">
+      <a:schemeClr val="lt1"/>
+    </dgm:fillClrLst>
+    <dgm:linClrLst meth="repeat">
+      <a:schemeClr val="accent2"/>
+    </dgm:linClrLst>
+    <dgm:effectClrLst/>
+    <dgm:txLinClrLst/>
+    <dgm:txFillClrLst meth="repeat">
+      <a:schemeClr val="dk1"/>
+    </dgm:txFillClrLst>
+    <dgm:txEffectClrLst/>
+  </dgm:styleLbl>
+  <dgm:styleLbl name="solidBgAcc1">
+    <dgm:fillClrLst meth="repeat">
+      <a:schemeClr val="lt1"/>
+    </dgm:fillClrLst>
+    <dgm:linClrLst meth="repeat">
+      <a:schemeClr val="accent2"/>
+    </dgm:linClrLst>
+    <dgm:effectClrLst/>
+    <dgm:txLinClrLst/>
+    <dgm:txFillClrLst meth="repeat">
+      <a:schemeClr val="dk1"/>
+    </dgm:txFillClrLst>
+    <dgm:txEffectClrLst/>
+  </dgm:styleLbl>
+  <dgm:styleLbl name="fgAccFollowNode1">
+    <dgm:fillClrLst meth="repeat">
+      <a:schemeClr val="accent2">
+        <a:alpha val="90000"/>
+        <a:tint val="40000"/>
+      </a:schemeClr>
+    </dgm:fillClrLst>
+    <dgm:linClrLst meth="repeat">
+      <a:schemeClr val="accent2">
+        <a:alpha val="90000"/>
+        <a:tint val="40000"/>
+      </a:schemeClr>
+    </dgm:linClrLst>
+    <dgm:effectClrLst/>
+    <dgm:txLinClrLst/>
+    <dgm:txFillClrLst meth="repeat">
+      <a:schemeClr val="dk1"/>
+    </dgm:txFillClrLst>
+    <dgm:txEffectClrLst/>
+  </dgm:styleLbl>
+  <dgm:styleLbl name="alignAccFollowNode1">
+    <dgm:fillClrLst meth="repeat">
+      <a:schemeClr val="accent2">
+        <a:alpha val="90000"/>
+        <a:tint val="40000"/>
+      </a:schemeClr>
+    </dgm:fillClrLst>
+    <dgm:linClrLst meth="repeat">
+      <a:schemeClr val="accent2">
+        <a:alpha val="90000"/>
+        <a:tint val="40000"/>
+      </a:schemeClr>
+    </dgm:linClrLst>
+    <dgm:effectClrLst/>
+    <dgm:txLinClrLst/>
+    <dgm:txFillClrLst meth="repeat">
+      <a:schemeClr val="dk1"/>
+    </dgm:txFillClrLst>
+    <dgm:txEffectClrLst/>
+  </dgm:styleLbl>
+  <dgm:styleLbl name="bgAccFollowNode1">
+    <dgm:fillClrLst meth="repeat">
+      <a:schemeClr val="accent2">
+        <a:alpha val="90000"/>
+        <a:tint val="40000"/>
+      </a:schemeClr>
+    </dgm:fillClrLst>
+    <dgm:linClrLst meth="repeat">
+      <a:schemeClr val="accent2">
+        <a:alpha val="90000"/>
+        <a:tint val="40000"/>
+      </a:schemeClr>
+    </dgm:linClrLst>
+    <dgm:effectClrLst/>
+    <dgm:txLinClrLst/>
+    <dgm:txFillClrLst meth="repeat">
+      <a:schemeClr val="dk1"/>
+    </dgm:txFillClrLst>
+    <dgm:txEffectClrLst/>
+  </dgm:styleLbl>
+  <dgm:styleLbl name="fgAcc0">
+    <dgm:fillClrLst meth="repeat">
+      <a:schemeClr val="lt1">
+        <a:alpha val="90000"/>
+      </a:schemeClr>
+    </dgm:fillClrLst>
+    <dgm:linClrLst meth="repeat">
+      <a:schemeClr val="accent2"/>
+    </dgm:linClrLst>
+    <dgm:effectClrLst/>
+    <dgm:txLinClrLst/>
+    <dgm:txFillClrLst meth="repeat">
+      <a:schemeClr val="dk1"/>
+    </dgm:txFillClrLst>
+    <dgm:txEffectClrLst/>
+  </dgm:styleLbl>
+  <dgm:styleLbl name="fgAcc2">
+    <dgm:fillClrLst meth="repeat">
+      <a:schemeClr val="lt1">
+        <a:alpha val="90000"/>
+      </a:schemeClr>
+    </dgm:fillClrLst>
+    <dgm:linClrLst meth="repeat">
+      <a:schemeClr val="accent2"/>
+    </dgm:linClrLst>
+    <dgm:effectClrLst/>
+    <dgm:txLinClrLst/>
+    <dgm:txFillClrLst meth="repeat">
+      <a:schemeClr val="dk1"/>
+    </dgm:txFillClrLst>
+    <dgm:txEffectClrLst/>
+  </dgm:styleLbl>
+  <dgm:styleLbl name="fgAcc3">
+    <dgm:fillClrLst meth="repeat">
+      <a:schemeClr val="lt1">
+        <a:alpha val="90000"/>
+      </a:schemeClr>
+    </dgm:fillClrLst>
+    <dgm:linClrLst meth="repeat">
+      <a:schemeClr val="accent2"/>
+    </dgm:linClrLst>
+    <dgm:effectClrLst/>
+    <dgm:txLinClrLst/>
+    <dgm:txFillClrLst meth="repeat">
+      <a:schemeClr val="dk1"/>
+    </dgm:txFillClrLst>
+    <dgm:txEffectClrLst/>
+  </dgm:styleLbl>
+  <dgm:styleLbl name="fgAcc4">
+    <dgm:fillClrLst meth="repeat">
+      <a:schemeClr val="lt1">
+        <a:alpha val="90000"/>
+      </a:schemeClr>
+    </dgm:fillClrLst>
+    <dgm:linClrLst meth="repeat">
+      <a:schemeClr val="accent2"/>
+    </dgm:linClrLst>
+    <dgm:effectClrLst/>
+    <dgm:txLinClrLst/>
+    <dgm:txFillClrLst meth="repeat">
+      <a:schemeClr val="dk1"/>
+    </dgm:txFillClrLst>
+    <dgm:txEffectClrLst/>
+  </dgm:styleLbl>
+  <dgm:styleLbl name="bgShp">
+    <dgm:fillClrLst meth="repeat">
+      <a:schemeClr val="accent2">
+        <a:tint val="40000"/>
+      </a:schemeClr>
+    </dgm:fillClrLst>
+    <dgm:linClrLst meth="repeat">
+      <a:schemeClr val="accent2"/>
+    </dgm:linClrLst>
+    <dgm:effectClrLst/>
+    <dgm:txLinClrLst/>
+    <dgm:txFillClrLst meth="repeat">
+      <a:schemeClr val="dk1"/>
+    </dgm:txFillClrLst>
+    <dgm:txEffectClrLst/>
+  </dgm:styleLbl>
+  <dgm:styleLbl name="dkBgShp">
+    <dgm:fillClrLst meth="repeat">
+      <a:schemeClr val="accent2">
+        <a:shade val="80000"/>
+      </a:schemeClr>
+    </dgm:fillClrLst>
+    <dgm:linClrLst meth="repeat">
+      <a:schemeClr val="accent2"/>
+    </dgm:linClrLst>
+    <dgm:effectClrLst/>
+    <dgm:txLinClrLst/>
+    <dgm:txFillClrLst meth="repeat">
+      <a:schemeClr val="lt1"/>
+    </dgm:txFillClrLst>
+    <dgm:txEffectClrLst/>
+  </dgm:styleLbl>
+  <dgm:styleLbl name="trBgShp">
+    <dgm:fillClrLst meth="repeat">
+      <a:schemeClr val="accent2">
+        <a:tint val="50000"/>
+        <a:alpha val="40000"/>
+      </a:schemeClr>
+    </dgm:fillClrLst>
+    <dgm:linClrLst meth="repeat">
+      <a:schemeClr val="accent2"/>
+    </dgm:linClrLst>
+    <dgm:effectClrLst/>
+    <dgm:txLinClrLst/>
+    <dgm:txFillClrLst meth="repeat">
+      <a:schemeClr val="lt1"/>
+    </dgm:txFillClrLst>
+    <dgm:txEffectClrLst/>
+  </dgm:styleLbl>
+  <dgm:styleLbl name="fgShp">
+    <dgm:fillClrLst meth="repeat">
+      <a:schemeClr val="accent2">
         <a:tint val="60000"/>
       </a:schemeClr>
     </dgm:fillClrLst>
@@ -1997,6 +2745,217 @@
           </a:solidFill>
         </a:ln>
       </dgm:spPr>
+      <dgm:t>
+        <a:bodyPr/>
+        <a:lstStyle/>
+        <a:p>
+          <a:endParaRPr lang="en-US"/>
+        </a:p>
+      </dgm:t>
+    </dgm:pt>
+    <dgm:pt modelId="{A41097E1-5F7E-D144-A9D7-2FBD932F16E7}" type="pres">
+      <dgm:prSet presAssocID="{C6A1BE27-8585-934D-9A3E-6DBD471EC68B}" presName="cycle" presStyleCnt="0">
+        <dgm:presLayoutVars>
+          <dgm:dir/>
+          <dgm:resizeHandles val="exact"/>
+        </dgm:presLayoutVars>
+      </dgm:prSet>
+      <dgm:spPr/>
+    </dgm:pt>
+    <dgm:pt modelId="{2AC30CCF-48F9-F94F-8A38-9F9473E87A55}" type="pres">
+      <dgm:prSet presAssocID="{A45DE8C2-46EF-C94A-BB38-33D5330CEC05}" presName="dummy" presStyleCnt="0"/>
+      <dgm:spPr/>
+    </dgm:pt>
+    <dgm:pt modelId="{E11F90E8-5265-E941-814C-917917C66AE7}" type="pres">
+      <dgm:prSet presAssocID="{A45DE8C2-46EF-C94A-BB38-33D5330CEC05}" presName="node" presStyleLbl="revTx" presStyleIdx="0" presStyleCnt="3">
+        <dgm:presLayoutVars>
+          <dgm:bulletEnabled val="1"/>
+        </dgm:presLayoutVars>
+      </dgm:prSet>
+      <dgm:spPr/>
+    </dgm:pt>
+    <dgm:pt modelId="{C391997F-1F0A-C743-91F8-31C6201C0280}" type="pres">
+      <dgm:prSet presAssocID="{946265C1-6D8B-7B44-A5E1-CFED294E1FF9}" presName="sibTrans" presStyleLbl="node1" presStyleIdx="0" presStyleCnt="3" custScaleX="99320" custScaleY="99320"/>
+      <dgm:spPr/>
+    </dgm:pt>
+    <dgm:pt modelId="{4B396FB2-5776-EA47-8372-59244D93E5D6}" type="pres">
+      <dgm:prSet presAssocID="{9F5D020A-930A-7748-9249-7A495284B53C}" presName="dummy" presStyleCnt="0"/>
+      <dgm:spPr/>
+    </dgm:pt>
+    <dgm:pt modelId="{B89E1495-C8D7-C84E-9BDC-AD01C585937E}" type="pres">
+      <dgm:prSet presAssocID="{9F5D020A-930A-7748-9249-7A495284B53C}" presName="node" presStyleLbl="revTx" presStyleIdx="1" presStyleCnt="3">
+        <dgm:presLayoutVars>
+          <dgm:bulletEnabled val="1"/>
+        </dgm:presLayoutVars>
+      </dgm:prSet>
+      <dgm:spPr/>
+    </dgm:pt>
+    <dgm:pt modelId="{D33081EC-A7D3-5F4A-BA39-400ECDBBEF2C}" type="pres">
+      <dgm:prSet presAssocID="{3B4BD402-F6C8-C34B-8338-5B0DDCCF70D9}" presName="sibTrans" presStyleLbl="node1" presStyleIdx="1" presStyleCnt="3"/>
+      <dgm:spPr/>
+    </dgm:pt>
+    <dgm:pt modelId="{9E691687-7DDC-7E42-96E0-C438994CCC4A}" type="pres">
+      <dgm:prSet presAssocID="{46982C2B-4E68-D64F-92A0-586A2A4E0B32}" presName="dummy" presStyleCnt="0"/>
+      <dgm:spPr/>
+    </dgm:pt>
+    <dgm:pt modelId="{26AF856B-61D7-E14E-96E2-CF12D2B51764}" type="pres">
+      <dgm:prSet presAssocID="{46982C2B-4E68-D64F-92A0-586A2A4E0B32}" presName="node" presStyleLbl="revTx" presStyleIdx="2" presStyleCnt="3">
+        <dgm:presLayoutVars>
+          <dgm:bulletEnabled val="1"/>
+        </dgm:presLayoutVars>
+      </dgm:prSet>
+      <dgm:spPr/>
+    </dgm:pt>
+    <dgm:pt modelId="{E4926503-7C80-F346-B057-D5ED32FD2A38}" type="pres">
+      <dgm:prSet presAssocID="{B24C4B38-0FDA-C74D-95D7-408C3E4FF5F0}" presName="sibTrans" presStyleLbl="node1" presStyleIdx="2" presStyleCnt="3"/>
+      <dgm:spPr/>
+    </dgm:pt>
+  </dgm:ptLst>
+  <dgm:cxnLst>
+    <dgm:cxn modelId="{B10E5901-E610-784D-B237-37221D2D9A26}" srcId="{C6A1BE27-8585-934D-9A3E-6DBD471EC68B}" destId="{46982C2B-4E68-D64F-92A0-586A2A4E0B32}" srcOrd="2" destOrd="0" parTransId="{510023EB-4AB4-A540-BF0B-E763D53E6471}" sibTransId="{B24C4B38-0FDA-C74D-95D7-408C3E4FF5F0}"/>
+    <dgm:cxn modelId="{9DA8E61E-ABFB-9743-A91E-116136B42875}" srcId="{C6A1BE27-8585-934D-9A3E-6DBD471EC68B}" destId="{A45DE8C2-46EF-C94A-BB38-33D5330CEC05}" srcOrd="0" destOrd="0" parTransId="{D6B667E7-CC9C-7045-B082-B86D92686338}" sibTransId="{946265C1-6D8B-7B44-A5E1-CFED294E1FF9}"/>
+    <dgm:cxn modelId="{9A2D162F-C6AF-AF4F-A348-D42FF4E845DA}" type="presOf" srcId="{9F5D020A-930A-7748-9249-7A495284B53C}" destId="{B89E1495-C8D7-C84E-9BDC-AD01C585937E}" srcOrd="0" destOrd="0" presId="urn:microsoft.com/office/officeart/2005/8/layout/cycle1"/>
+    <dgm:cxn modelId="{037CE935-553B-AD4C-B69B-D8B58A3AF046}" type="presOf" srcId="{C6A1BE27-8585-934D-9A3E-6DBD471EC68B}" destId="{A41097E1-5F7E-D144-A9D7-2FBD932F16E7}" srcOrd="0" destOrd="0" presId="urn:microsoft.com/office/officeart/2005/8/layout/cycle1"/>
+    <dgm:cxn modelId="{7F66183A-A83E-FC4C-83E4-01CAD94A1CA9}" type="presOf" srcId="{3B4BD402-F6C8-C34B-8338-5B0DDCCF70D9}" destId="{D33081EC-A7D3-5F4A-BA39-400ECDBBEF2C}" srcOrd="0" destOrd="0" presId="urn:microsoft.com/office/officeart/2005/8/layout/cycle1"/>
+    <dgm:cxn modelId="{FF9ABE47-5897-6148-AF34-51C5FCF9B527}" type="presOf" srcId="{946265C1-6D8B-7B44-A5E1-CFED294E1FF9}" destId="{C391997F-1F0A-C743-91F8-31C6201C0280}" srcOrd="0" destOrd="0" presId="urn:microsoft.com/office/officeart/2005/8/layout/cycle1"/>
+    <dgm:cxn modelId="{3107A860-AF6E-AC44-A9BE-0E47CADB24EC}" type="presOf" srcId="{A45DE8C2-46EF-C94A-BB38-33D5330CEC05}" destId="{E11F90E8-5265-E941-814C-917917C66AE7}" srcOrd="0" destOrd="0" presId="urn:microsoft.com/office/officeart/2005/8/layout/cycle1"/>
+    <dgm:cxn modelId="{8C37AB61-7B44-2847-ABB4-CD7543A36BBE}" type="presOf" srcId="{B24C4B38-0FDA-C74D-95D7-408C3E4FF5F0}" destId="{E4926503-7C80-F346-B057-D5ED32FD2A38}" srcOrd="0" destOrd="0" presId="urn:microsoft.com/office/officeart/2005/8/layout/cycle1"/>
+    <dgm:cxn modelId="{9D080368-BDAD-2E40-9D61-0268EEBCF489}" srcId="{C6A1BE27-8585-934D-9A3E-6DBD471EC68B}" destId="{9F5D020A-930A-7748-9249-7A495284B53C}" srcOrd="1" destOrd="0" parTransId="{580533E6-3A4A-F640-B33D-A9E7CA13C6BE}" sibTransId="{3B4BD402-F6C8-C34B-8338-5B0DDCCF70D9}"/>
+    <dgm:cxn modelId="{825DFCA8-2C17-D24F-A32B-1BEBADF5E195}" type="presOf" srcId="{46982C2B-4E68-D64F-92A0-586A2A4E0B32}" destId="{26AF856B-61D7-E14E-96E2-CF12D2B51764}" srcOrd="0" destOrd="0" presId="urn:microsoft.com/office/officeart/2005/8/layout/cycle1"/>
+    <dgm:cxn modelId="{C264F02F-1FE6-224C-8AC0-21878566C6AD}" type="presParOf" srcId="{A41097E1-5F7E-D144-A9D7-2FBD932F16E7}" destId="{2AC30CCF-48F9-F94F-8A38-9F9473E87A55}" srcOrd="0" destOrd="0" presId="urn:microsoft.com/office/officeart/2005/8/layout/cycle1"/>
+    <dgm:cxn modelId="{98DDFCDD-6260-8E43-BFA0-680EE664CE0E}" type="presParOf" srcId="{A41097E1-5F7E-D144-A9D7-2FBD932F16E7}" destId="{E11F90E8-5265-E941-814C-917917C66AE7}" srcOrd="1" destOrd="0" presId="urn:microsoft.com/office/officeart/2005/8/layout/cycle1"/>
+    <dgm:cxn modelId="{D6DF5808-2AD2-504B-94BB-EF8D98A8C4F5}" type="presParOf" srcId="{A41097E1-5F7E-D144-A9D7-2FBD932F16E7}" destId="{C391997F-1F0A-C743-91F8-31C6201C0280}" srcOrd="2" destOrd="0" presId="urn:microsoft.com/office/officeart/2005/8/layout/cycle1"/>
+    <dgm:cxn modelId="{0DEC769C-D3A9-4543-8953-8868B70EAD6C}" type="presParOf" srcId="{A41097E1-5F7E-D144-A9D7-2FBD932F16E7}" destId="{4B396FB2-5776-EA47-8372-59244D93E5D6}" srcOrd="3" destOrd="0" presId="urn:microsoft.com/office/officeart/2005/8/layout/cycle1"/>
+    <dgm:cxn modelId="{EC066466-70E8-4B40-A420-70B5490562CB}" type="presParOf" srcId="{A41097E1-5F7E-D144-A9D7-2FBD932F16E7}" destId="{B89E1495-C8D7-C84E-9BDC-AD01C585937E}" srcOrd="4" destOrd="0" presId="urn:microsoft.com/office/officeart/2005/8/layout/cycle1"/>
+    <dgm:cxn modelId="{6A7537C5-6124-2B4D-ABC7-B57C40ABA302}" type="presParOf" srcId="{A41097E1-5F7E-D144-A9D7-2FBD932F16E7}" destId="{D33081EC-A7D3-5F4A-BA39-400ECDBBEF2C}" srcOrd="5" destOrd="0" presId="urn:microsoft.com/office/officeart/2005/8/layout/cycle1"/>
+    <dgm:cxn modelId="{50A1DC7A-CFA2-7F48-AA4B-1FE7C444FD33}" type="presParOf" srcId="{A41097E1-5F7E-D144-A9D7-2FBD932F16E7}" destId="{9E691687-7DDC-7E42-96E0-C438994CCC4A}" srcOrd="6" destOrd="0" presId="urn:microsoft.com/office/officeart/2005/8/layout/cycle1"/>
+    <dgm:cxn modelId="{ED2C78DC-D86A-4A40-ADA3-D4871D1D9291}" type="presParOf" srcId="{A41097E1-5F7E-D144-A9D7-2FBD932F16E7}" destId="{26AF856B-61D7-E14E-96E2-CF12D2B51764}" srcOrd="7" destOrd="0" presId="urn:microsoft.com/office/officeart/2005/8/layout/cycle1"/>
+    <dgm:cxn modelId="{B1A130EA-2B55-9145-8AC9-3040E8DA476F}" type="presParOf" srcId="{A41097E1-5F7E-D144-A9D7-2FBD932F16E7}" destId="{E4926503-7C80-F346-B057-D5ED32FD2A38}" srcOrd="8" destOrd="0" presId="urn:microsoft.com/office/officeart/2005/8/layout/cycle1"/>
+  </dgm:cxnLst>
+  <dgm:bg/>
+  <dgm:whole/>
+  <dgm:extLst>
+    <a:ext uri="http://schemas.microsoft.com/office/drawing/2008/diagram">
+      <dsp:dataModelExt xmlns:dsp="http://schemas.microsoft.com/office/drawing/2008/diagram" relId="rId6" minVer="http://schemas.openxmlformats.org/drawingml/2006/diagram"/>
+    </a:ext>
+  </dgm:extLst>
+</dgm:dataModel>
+</file>
+
+<file path=ppt/diagrams/data3.xml><?xml version="1.0" encoding="utf-8"?>
+<dgm:dataModel xmlns:dgm="http://schemas.openxmlformats.org/drawingml/2006/diagram" xmlns:a="http://schemas.openxmlformats.org/drawingml/2006/main">
+  <dgm:ptLst>
+    <dgm:pt modelId="{C6A1BE27-8585-934D-9A3E-6DBD471EC68B}" type="doc">
+      <dgm:prSet loTypeId="urn:microsoft.com/office/officeart/2005/8/layout/cycle1" loCatId="" qsTypeId="urn:microsoft.com/office/officeart/2005/8/quickstyle/simple1" qsCatId="simple" csTypeId="urn:microsoft.com/office/officeart/2005/8/colors/accent2_2" csCatId="accent2" phldr="1"/>
+      <dgm:spPr/>
+      <dgm:t>
+        <a:bodyPr/>
+        <a:lstStyle/>
+        <a:p>
+          <a:endParaRPr lang="en-US"/>
+        </a:p>
+      </dgm:t>
+    </dgm:pt>
+    <dgm:pt modelId="{A45DE8C2-46EF-C94A-BB38-33D5330CEC05}">
+      <dgm:prSet phldrT="[Text]"/>
+      <dgm:spPr/>
+      <dgm:t>
+        <a:bodyPr/>
+        <a:lstStyle/>
+        <a:p>
+          <a:r>
+            <a:rPr lang="en-US" dirty="0"/>
+            <a:t> </a:t>
+          </a:r>
+        </a:p>
+      </dgm:t>
+    </dgm:pt>
+    <dgm:pt modelId="{D6B667E7-CC9C-7045-B082-B86D92686338}" type="parTrans" cxnId="{9DA8E61E-ABFB-9743-A91E-116136B42875}">
+      <dgm:prSet/>
+      <dgm:spPr/>
+      <dgm:t>
+        <a:bodyPr/>
+        <a:lstStyle/>
+        <a:p>
+          <a:endParaRPr lang="en-US"/>
+        </a:p>
+      </dgm:t>
+    </dgm:pt>
+    <dgm:pt modelId="{946265C1-6D8B-7B44-A5E1-CFED294E1FF9}" type="sibTrans" cxnId="{9DA8E61E-ABFB-9743-A91E-116136B42875}">
+      <dgm:prSet/>
+      <dgm:spPr/>
+      <dgm:t>
+        <a:bodyPr/>
+        <a:lstStyle/>
+        <a:p>
+          <a:endParaRPr lang="en-US"/>
+        </a:p>
+      </dgm:t>
+    </dgm:pt>
+    <dgm:pt modelId="{9F5D020A-930A-7748-9249-7A495284B53C}">
+      <dgm:prSet phldrT="[Text]"/>
+      <dgm:spPr/>
+      <dgm:t>
+        <a:bodyPr/>
+        <a:lstStyle/>
+        <a:p>
+          <a:r>
+            <a:rPr lang="en-US" dirty="0"/>
+            <a:t> </a:t>
+          </a:r>
+        </a:p>
+      </dgm:t>
+    </dgm:pt>
+    <dgm:pt modelId="{580533E6-3A4A-F640-B33D-A9E7CA13C6BE}" type="parTrans" cxnId="{9D080368-BDAD-2E40-9D61-0268EEBCF489}">
+      <dgm:prSet/>
+      <dgm:spPr/>
+      <dgm:t>
+        <a:bodyPr/>
+        <a:lstStyle/>
+        <a:p>
+          <a:endParaRPr lang="en-US"/>
+        </a:p>
+      </dgm:t>
+    </dgm:pt>
+    <dgm:pt modelId="{3B4BD402-F6C8-C34B-8338-5B0DDCCF70D9}" type="sibTrans" cxnId="{9D080368-BDAD-2E40-9D61-0268EEBCF489}">
+      <dgm:prSet/>
+      <dgm:spPr/>
+      <dgm:t>
+        <a:bodyPr/>
+        <a:lstStyle/>
+        <a:p>
+          <a:endParaRPr lang="en-US"/>
+        </a:p>
+      </dgm:t>
+    </dgm:pt>
+    <dgm:pt modelId="{46982C2B-4E68-D64F-92A0-586A2A4E0B32}">
+      <dgm:prSet phldrT="[Text]"/>
+      <dgm:spPr/>
+      <dgm:t>
+        <a:bodyPr/>
+        <a:lstStyle/>
+        <a:p>
+          <a:r>
+            <a:rPr lang="en-US" dirty="0"/>
+            <a:t> </a:t>
+          </a:r>
+        </a:p>
+      </dgm:t>
+    </dgm:pt>
+    <dgm:pt modelId="{510023EB-4AB4-A540-BF0B-E763D53E6471}" type="parTrans" cxnId="{B10E5901-E610-784D-B237-37221D2D9A26}">
+      <dgm:prSet/>
+      <dgm:spPr/>
+      <dgm:t>
+        <a:bodyPr/>
+        <a:lstStyle/>
+        <a:p>
+          <a:endParaRPr lang="en-US"/>
+        </a:p>
+      </dgm:t>
+    </dgm:pt>
+    <dgm:pt modelId="{B24C4B38-0FDA-C74D-95D7-408C3E4FF5F0}" type="sibTrans" cxnId="{B10E5901-E610-784D-B237-37221D2D9A26}">
+      <dgm:prSet/>
+      <dgm:spPr/>
       <dgm:t>
         <a:bodyPr/>
         <a:lstStyle/>
@@ -2754,6 +3713,366 @@
 </dsp:drawing>
 </file>
 
+<file path=ppt/diagrams/drawing3.xml><?xml version="1.0" encoding="utf-8"?>
+<dsp:drawing xmlns:dgm="http://schemas.openxmlformats.org/drawingml/2006/diagram" xmlns:dsp="http://schemas.microsoft.com/office/drawing/2008/diagram" xmlns:a="http://schemas.openxmlformats.org/drawingml/2006/main">
+  <dsp:spTree>
+    <dsp:nvGrpSpPr>
+      <dsp:cNvPr id="0" name=""/>
+      <dsp:cNvGrpSpPr/>
+    </dsp:nvGrpSpPr>
+    <dsp:grpSpPr/>
+    <dsp:sp modelId="{E11F90E8-5265-E941-814C-917917C66AE7}">
+      <dsp:nvSpPr>
+        <dsp:cNvPr id="0" name=""/>
+        <dsp:cNvSpPr/>
+      </dsp:nvSpPr>
+      <dsp:spPr>
+        <a:xfrm>
+          <a:off x="3607955" y="302799"/>
+          <a:ext cx="1549390" cy="1549390"/>
+        </a:xfrm>
+        <a:prstGeom prst="rect">
+          <a:avLst/>
+        </a:prstGeom>
+        <a:noFill/>
+        <a:ln>
+          <a:noFill/>
+        </a:ln>
+        <a:effectLst/>
+      </dsp:spPr>
+      <dsp:style>
+        <a:lnRef idx="0">
+          <a:scrgbClr r="0" g="0" b="0"/>
+        </a:lnRef>
+        <a:fillRef idx="0">
+          <a:scrgbClr r="0" g="0" b="0"/>
+        </a:fillRef>
+        <a:effectRef idx="0">
+          <a:scrgbClr r="0" g="0" b="0"/>
+        </a:effectRef>
+        <a:fontRef idx="minor"/>
+      </dsp:style>
+      <dsp:txBody>
+        <a:bodyPr spcFirstLastPara="0" vert="horz" wrap="square" lIns="82550" tIns="82550" rIns="82550" bIns="82550" numCol="1" spcCol="1270" anchor="ctr" anchorCtr="0">
+          <a:noAutofit/>
+        </a:bodyPr>
+        <a:lstStyle/>
+        <a:p>
+          <a:pPr marL="0" lvl="0" indent="0" algn="ctr" defTabSz="2889250">
+            <a:lnSpc>
+              <a:spcPct val="90000"/>
+            </a:lnSpc>
+            <a:spcBef>
+              <a:spcPct val="0"/>
+            </a:spcBef>
+            <a:spcAft>
+              <a:spcPct val="35000"/>
+            </a:spcAft>
+            <a:buNone/>
+          </a:pPr>
+          <a:r>
+            <a:rPr lang="en-US" sz="6500" kern="1200" dirty="0"/>
+            <a:t> </a:t>
+          </a:r>
+        </a:p>
+      </dsp:txBody>
+      <dsp:txXfrm>
+        <a:off x="3607955" y="302799"/>
+        <a:ext cx="1549390" cy="1549390"/>
+      </dsp:txXfrm>
+    </dsp:sp>
+    <dsp:sp modelId="{C391997F-1F0A-C743-91F8-31C6201C0280}">
+      <dsp:nvSpPr>
+        <dsp:cNvPr id="0" name=""/>
+        <dsp:cNvSpPr/>
+      </dsp:nvSpPr>
+      <dsp:spPr>
+        <a:xfrm>
+          <a:off x="1262541" y="10970"/>
+          <a:ext cx="3636377" cy="3636377"/>
+        </a:xfrm>
+        <a:prstGeom prst="circularArrow">
+          <a:avLst>
+            <a:gd name="adj1" fmla="val 8252"/>
+            <a:gd name="adj2" fmla="val 576426"/>
+            <a:gd name="adj3" fmla="val 2962443"/>
+            <a:gd name="adj4" fmla="val 52669"/>
+            <a:gd name="adj5" fmla="val 9627"/>
+          </a:avLst>
+        </a:prstGeom>
+        <a:solidFill>
+          <a:schemeClr val="accent2">
+            <a:hueOff val="0"/>
+            <a:satOff val="0"/>
+            <a:lumOff val="0"/>
+            <a:alphaOff val="0"/>
+          </a:schemeClr>
+        </a:solidFill>
+        <a:ln w="12700" cap="flat" cmpd="sng" algn="ctr">
+          <a:solidFill>
+            <a:schemeClr val="lt1">
+              <a:hueOff val="0"/>
+              <a:satOff val="0"/>
+              <a:lumOff val="0"/>
+              <a:alphaOff val="0"/>
+            </a:schemeClr>
+          </a:solidFill>
+          <a:prstDash val="solid"/>
+          <a:miter lim="800000"/>
+        </a:ln>
+        <a:effectLst/>
+      </dsp:spPr>
+      <dsp:style>
+        <a:lnRef idx="2">
+          <a:scrgbClr r="0" g="0" b="0"/>
+        </a:lnRef>
+        <a:fillRef idx="1">
+          <a:scrgbClr r="0" g="0" b="0"/>
+        </a:fillRef>
+        <a:effectRef idx="0">
+          <a:scrgbClr r="0" g="0" b="0"/>
+        </a:effectRef>
+        <a:fontRef idx="minor">
+          <a:schemeClr val="lt1"/>
+        </a:fontRef>
+      </dsp:style>
+    </dsp:sp>
+    <dsp:sp modelId="{B89E1495-C8D7-C84E-9BDC-AD01C585937E}">
+      <dsp:nvSpPr>
+        <dsp:cNvPr id="0" name=""/>
+        <dsp:cNvSpPr/>
+      </dsp:nvSpPr>
+      <dsp:spPr>
+        <a:xfrm>
+          <a:off x="2306035" y="2557791"/>
+          <a:ext cx="1549390" cy="1549390"/>
+        </a:xfrm>
+        <a:prstGeom prst="rect">
+          <a:avLst/>
+        </a:prstGeom>
+        <a:noFill/>
+        <a:ln>
+          <a:noFill/>
+        </a:ln>
+        <a:effectLst/>
+      </dsp:spPr>
+      <dsp:style>
+        <a:lnRef idx="0">
+          <a:scrgbClr r="0" g="0" b="0"/>
+        </a:lnRef>
+        <a:fillRef idx="0">
+          <a:scrgbClr r="0" g="0" b="0"/>
+        </a:fillRef>
+        <a:effectRef idx="0">
+          <a:scrgbClr r="0" g="0" b="0"/>
+        </a:effectRef>
+        <a:fontRef idx="minor"/>
+      </dsp:style>
+      <dsp:txBody>
+        <a:bodyPr spcFirstLastPara="0" vert="horz" wrap="square" lIns="82550" tIns="82550" rIns="82550" bIns="82550" numCol="1" spcCol="1270" anchor="ctr" anchorCtr="0">
+          <a:noAutofit/>
+        </a:bodyPr>
+        <a:lstStyle/>
+        <a:p>
+          <a:pPr marL="0" lvl="0" indent="0" algn="ctr" defTabSz="2889250">
+            <a:lnSpc>
+              <a:spcPct val="90000"/>
+            </a:lnSpc>
+            <a:spcBef>
+              <a:spcPct val="0"/>
+            </a:spcBef>
+            <a:spcAft>
+              <a:spcPct val="35000"/>
+            </a:spcAft>
+            <a:buNone/>
+          </a:pPr>
+          <a:r>
+            <a:rPr lang="en-US" sz="6500" kern="1200" dirty="0"/>
+            <a:t> </a:t>
+          </a:r>
+        </a:p>
+      </dsp:txBody>
+      <dsp:txXfrm>
+        <a:off x="2306035" y="2557791"/>
+        <a:ext cx="1549390" cy="1549390"/>
+      </dsp:txXfrm>
+    </dsp:sp>
+    <dsp:sp modelId="{D33081EC-A7D3-5F4A-BA39-400ECDBBEF2C}">
+      <dsp:nvSpPr>
+        <dsp:cNvPr id="0" name=""/>
+        <dsp:cNvSpPr/>
+      </dsp:nvSpPr>
+      <dsp:spPr>
+        <a:xfrm>
+          <a:off x="1250093" y="-1478"/>
+          <a:ext cx="3661274" cy="3661274"/>
+        </a:xfrm>
+        <a:prstGeom prst="circularArrow">
+          <a:avLst>
+            <a:gd name="adj1" fmla="val 8252"/>
+            <a:gd name="adj2" fmla="val 576426"/>
+            <a:gd name="adj3" fmla="val 10170905"/>
+            <a:gd name="adj4" fmla="val 7261132"/>
+            <a:gd name="adj5" fmla="val 9627"/>
+          </a:avLst>
+        </a:prstGeom>
+        <a:solidFill>
+          <a:schemeClr val="accent2">
+            <a:hueOff val="0"/>
+            <a:satOff val="0"/>
+            <a:lumOff val="0"/>
+            <a:alphaOff val="0"/>
+          </a:schemeClr>
+        </a:solidFill>
+        <a:ln w="12700" cap="flat" cmpd="sng" algn="ctr">
+          <a:solidFill>
+            <a:schemeClr val="lt1">
+              <a:hueOff val="0"/>
+              <a:satOff val="0"/>
+              <a:lumOff val="0"/>
+              <a:alphaOff val="0"/>
+            </a:schemeClr>
+          </a:solidFill>
+          <a:prstDash val="solid"/>
+          <a:miter lim="800000"/>
+        </a:ln>
+        <a:effectLst/>
+      </dsp:spPr>
+      <dsp:style>
+        <a:lnRef idx="2">
+          <a:scrgbClr r="0" g="0" b="0"/>
+        </a:lnRef>
+        <a:fillRef idx="1">
+          <a:scrgbClr r="0" g="0" b="0"/>
+        </a:fillRef>
+        <a:effectRef idx="0">
+          <a:scrgbClr r="0" g="0" b="0"/>
+        </a:effectRef>
+        <a:fontRef idx="minor">
+          <a:schemeClr val="lt1"/>
+        </a:fontRef>
+      </dsp:style>
+    </dsp:sp>
+    <dsp:sp modelId="{26AF856B-61D7-E14E-96E2-CF12D2B51764}">
+      <dsp:nvSpPr>
+        <dsp:cNvPr id="0" name=""/>
+        <dsp:cNvSpPr/>
+      </dsp:nvSpPr>
+      <dsp:spPr>
+        <a:xfrm>
+          <a:off x="1004114" y="302799"/>
+          <a:ext cx="1549390" cy="1549390"/>
+        </a:xfrm>
+        <a:prstGeom prst="rect">
+          <a:avLst/>
+        </a:prstGeom>
+        <a:noFill/>
+        <a:ln>
+          <a:noFill/>
+        </a:ln>
+        <a:effectLst/>
+      </dsp:spPr>
+      <dsp:style>
+        <a:lnRef idx="0">
+          <a:scrgbClr r="0" g="0" b="0"/>
+        </a:lnRef>
+        <a:fillRef idx="0">
+          <a:scrgbClr r="0" g="0" b="0"/>
+        </a:fillRef>
+        <a:effectRef idx="0">
+          <a:scrgbClr r="0" g="0" b="0"/>
+        </a:effectRef>
+        <a:fontRef idx="minor"/>
+      </dsp:style>
+      <dsp:txBody>
+        <a:bodyPr spcFirstLastPara="0" vert="horz" wrap="square" lIns="82550" tIns="82550" rIns="82550" bIns="82550" numCol="1" spcCol="1270" anchor="ctr" anchorCtr="0">
+          <a:noAutofit/>
+        </a:bodyPr>
+        <a:lstStyle/>
+        <a:p>
+          <a:pPr marL="0" lvl="0" indent="0" algn="ctr" defTabSz="2889250">
+            <a:lnSpc>
+              <a:spcPct val="90000"/>
+            </a:lnSpc>
+            <a:spcBef>
+              <a:spcPct val="0"/>
+            </a:spcBef>
+            <a:spcAft>
+              <a:spcPct val="35000"/>
+            </a:spcAft>
+            <a:buNone/>
+          </a:pPr>
+          <a:r>
+            <a:rPr lang="en-US" sz="6500" kern="1200" dirty="0"/>
+            <a:t> </a:t>
+          </a:r>
+        </a:p>
+      </dsp:txBody>
+      <dsp:txXfrm>
+        <a:off x="1004114" y="302799"/>
+        <a:ext cx="1549390" cy="1549390"/>
+      </dsp:txXfrm>
+    </dsp:sp>
+    <dsp:sp modelId="{E4926503-7C80-F346-B057-D5ED32FD2A38}">
+      <dsp:nvSpPr>
+        <dsp:cNvPr id="0" name=""/>
+        <dsp:cNvSpPr/>
+      </dsp:nvSpPr>
+      <dsp:spPr>
+        <a:xfrm>
+          <a:off x="1250093" y="-1478"/>
+          <a:ext cx="3661274" cy="3661274"/>
+        </a:xfrm>
+        <a:prstGeom prst="circularArrow">
+          <a:avLst>
+            <a:gd name="adj1" fmla="val 8252"/>
+            <a:gd name="adj2" fmla="val 576426"/>
+            <a:gd name="adj3" fmla="val 16855402"/>
+            <a:gd name="adj4" fmla="val 14968173"/>
+            <a:gd name="adj5" fmla="val 9627"/>
+          </a:avLst>
+        </a:prstGeom>
+        <a:solidFill>
+          <a:schemeClr val="accent2">
+            <a:hueOff val="0"/>
+            <a:satOff val="0"/>
+            <a:lumOff val="0"/>
+            <a:alphaOff val="0"/>
+          </a:schemeClr>
+        </a:solidFill>
+        <a:ln w="12700" cap="flat" cmpd="sng" algn="ctr">
+          <a:solidFill>
+            <a:schemeClr val="lt1">
+              <a:hueOff val="0"/>
+              <a:satOff val="0"/>
+              <a:lumOff val="0"/>
+              <a:alphaOff val="0"/>
+            </a:schemeClr>
+          </a:solidFill>
+          <a:prstDash val="solid"/>
+          <a:miter lim="800000"/>
+        </a:ln>
+        <a:effectLst/>
+      </dsp:spPr>
+      <dsp:style>
+        <a:lnRef idx="2">
+          <a:scrgbClr r="0" g="0" b="0"/>
+        </a:lnRef>
+        <a:fillRef idx="1">
+          <a:scrgbClr r="0" g="0" b="0"/>
+        </a:fillRef>
+        <a:effectRef idx="0">
+          <a:scrgbClr r="0" g="0" b="0"/>
+        </a:effectRef>
+        <a:fontRef idx="minor">
+          <a:schemeClr val="lt1"/>
+        </a:fontRef>
+      </dsp:style>
+    </dsp:sp>
+  </dsp:spTree>
+</dsp:drawing>
+</file>
+
 <file path=ppt/diagrams/layout1.xml><?xml version="1.0" encoding="utf-8"?>
 <dgm:layoutDef xmlns:dgm="http://schemas.openxmlformats.org/drawingml/2006/diagram" xmlns:a="http://schemas.openxmlformats.org/drawingml/2006/main" uniqueId="urn:microsoft.com/office/officeart/2005/8/layout/cycle1">
   <dgm:title val=""/>
@@ -3150,6 +4469,204 @@
 </dgm:layoutDef>
 </file>
 
+<file path=ppt/diagrams/layout3.xml><?xml version="1.0" encoding="utf-8"?>
+<dgm:layoutDef xmlns:dgm="http://schemas.openxmlformats.org/drawingml/2006/diagram" xmlns:a="http://schemas.openxmlformats.org/drawingml/2006/main" uniqueId="urn:microsoft.com/office/officeart/2005/8/layout/cycle1">
+  <dgm:title val=""/>
+  <dgm:desc val=""/>
+  <dgm:catLst>
+    <dgm:cat type="cycle" pri="2000"/>
+  </dgm:catLst>
+  <dgm:sampData>
+    <dgm:dataModel>
+      <dgm:ptLst>
+        <dgm:pt modelId="0" type="doc"/>
+        <dgm:pt modelId="1">
+          <dgm:prSet phldr="1"/>
+        </dgm:pt>
+        <dgm:pt modelId="2">
+          <dgm:prSet phldr="1"/>
+        </dgm:pt>
+        <dgm:pt modelId="3">
+          <dgm:prSet phldr="1"/>
+        </dgm:pt>
+        <dgm:pt modelId="4">
+          <dgm:prSet phldr="1"/>
+        </dgm:pt>
+        <dgm:pt modelId="5">
+          <dgm:prSet phldr="1"/>
+        </dgm:pt>
+      </dgm:ptLst>
+      <dgm:cxnLst>
+        <dgm:cxn modelId="6" srcId="0" destId="1" srcOrd="0" destOrd="0"/>
+        <dgm:cxn modelId="7" srcId="0" destId="2" srcOrd="1" destOrd="0"/>
+        <dgm:cxn modelId="8" srcId="0" destId="3" srcOrd="2" destOrd="0"/>
+        <dgm:cxn modelId="9" srcId="0" destId="4" srcOrd="3" destOrd="0"/>
+        <dgm:cxn modelId="10" srcId="0" destId="5" srcOrd="4" destOrd="0"/>
+      </dgm:cxnLst>
+      <dgm:bg/>
+      <dgm:whole/>
+    </dgm:dataModel>
+  </dgm:sampData>
+  <dgm:styleData>
+    <dgm:dataModel>
+      <dgm:ptLst>
+        <dgm:pt modelId="0" type="doc"/>
+        <dgm:pt modelId="1"/>
+        <dgm:pt modelId="2"/>
+        <dgm:pt modelId="3"/>
+      </dgm:ptLst>
+      <dgm:cxnLst>
+        <dgm:cxn modelId="4" srcId="0" destId="1" srcOrd="0" destOrd="0"/>
+        <dgm:cxn modelId="5" srcId="0" destId="2" srcOrd="1" destOrd="0"/>
+        <dgm:cxn modelId="6" srcId="0" destId="3" srcOrd="2" destOrd="0"/>
+      </dgm:cxnLst>
+      <dgm:bg/>
+      <dgm:whole/>
+    </dgm:dataModel>
+  </dgm:styleData>
+  <dgm:clrData>
+    <dgm:dataModel>
+      <dgm:ptLst>
+        <dgm:pt modelId="0" type="doc"/>
+        <dgm:pt modelId="1"/>
+        <dgm:pt modelId="2"/>
+        <dgm:pt modelId="3"/>
+        <dgm:pt modelId="4"/>
+        <dgm:pt modelId="5"/>
+        <dgm:pt modelId="6"/>
+      </dgm:ptLst>
+      <dgm:cxnLst>
+        <dgm:cxn modelId="7" srcId="0" destId="1" srcOrd="0" destOrd="0"/>
+        <dgm:cxn modelId="8" srcId="0" destId="2" srcOrd="1" destOrd="0"/>
+        <dgm:cxn modelId="9" srcId="0" destId="3" srcOrd="2" destOrd="0"/>
+        <dgm:cxn modelId="10" srcId="0" destId="4" srcOrd="3" destOrd="0"/>
+        <dgm:cxn modelId="11" srcId="0" destId="5" srcOrd="4" destOrd="0"/>
+        <dgm:cxn modelId="12" srcId="0" destId="6" srcOrd="5" destOrd="0"/>
+      </dgm:cxnLst>
+      <dgm:bg/>
+      <dgm:whole/>
+    </dgm:dataModel>
+  </dgm:clrData>
+  <dgm:layoutNode name="cycle">
+    <dgm:varLst>
+      <dgm:dir/>
+      <dgm:resizeHandles val="exact"/>
+    </dgm:varLst>
+    <dgm:choose name="Name0">
+      <dgm:if name="Name1" func="var" arg="dir" op="equ" val="norm">
+        <dgm:alg type="cycle">
+          <dgm:param type="stAng" val="0"/>
+          <dgm:param type="spanAng" val="360"/>
+        </dgm:alg>
+      </dgm:if>
+      <dgm:else name="Name2">
+        <dgm:alg type="cycle">
+          <dgm:param type="stAng" val="0"/>
+          <dgm:param type="spanAng" val="-360"/>
+        </dgm:alg>
+      </dgm:else>
+    </dgm:choose>
+    <dgm:shape xmlns:r="http://schemas.openxmlformats.org/officeDocument/2006/relationships" r:blip="">
+      <dgm:adjLst/>
+    </dgm:shape>
+    <dgm:presOf/>
+    <dgm:choose name="Name3">
+      <dgm:if name="Name4" func="var" arg="dir" op="equ" val="norm">
+        <dgm:constrLst>
+          <dgm:constr type="diam" val="1"/>
+          <dgm:constr type="w" for="ch" forName="node" refType="w"/>
+          <dgm:constr type="w" for="ch" ptType="sibTrans" refType="w" refFor="ch" refForName="node" fact="0.5"/>
+          <dgm:constr type="h" for="ch" ptType="sibTrans" op="equ"/>
+          <dgm:constr type="diam" for="ch" ptType="sibTrans" refType="diam" op="equ"/>
+          <dgm:constr type="sibSp" refType="w" refFor="ch" refForName="node" fact="0.15"/>
+          <dgm:constr type="w" for="ch" forName="dummy" refType="sibSp" fact="2.8"/>
+          <dgm:constr type="primFontSz" for="ch" forName="node" op="equ" val="65"/>
+        </dgm:constrLst>
+      </dgm:if>
+      <dgm:else name="Name5">
+        <dgm:constrLst>
+          <dgm:constr type="diam" val="1"/>
+          <dgm:constr type="w" for="ch" forName="node" refType="w"/>
+          <dgm:constr type="w" for="ch" ptType="sibTrans" refType="w" refFor="ch" refForName="node" fact="0.5"/>
+          <dgm:constr type="h" for="ch" ptType="sibTrans" op="equ"/>
+          <dgm:constr type="diam" for="ch" ptType="sibTrans" refType="diam" op="equ" fact="-1"/>
+          <dgm:constr type="sibSp" refType="w" refFor="ch" refForName="node" fact="0.15"/>
+          <dgm:constr type="w" for="ch" forName="dummy" refType="sibSp" fact="2.8"/>
+          <dgm:constr type="primFontSz" for="ch" forName="node" op="equ" val="65"/>
+        </dgm:constrLst>
+      </dgm:else>
+    </dgm:choose>
+    <dgm:ruleLst>
+      <dgm:rule type="diam" val="INF" fact="NaN" max="NaN"/>
+    </dgm:ruleLst>
+    <dgm:forEach name="nodesForEach" axis="ch" ptType="node">
+      <dgm:choose name="Name6">
+        <dgm:if name="Name7" axis="par ch" ptType="doc node" func="cnt" op="gt" val="1">
+          <dgm:layoutNode name="dummy">
+            <dgm:alg type="sp"/>
+            <dgm:shape xmlns:r="http://schemas.openxmlformats.org/officeDocument/2006/relationships" r:blip="">
+              <dgm:adjLst/>
+            </dgm:shape>
+            <dgm:presOf/>
+            <dgm:constrLst>
+              <dgm:constr type="h" refType="w"/>
+            </dgm:constrLst>
+            <dgm:ruleLst/>
+          </dgm:layoutNode>
+        </dgm:if>
+        <dgm:else name="Name8"/>
+      </dgm:choose>
+      <dgm:layoutNode name="node" styleLbl="revTx">
+        <dgm:varLst>
+          <dgm:bulletEnabled val="1"/>
+        </dgm:varLst>
+        <dgm:alg type="tx">
+          <dgm:param type="txAnchorVertCh" val="mid"/>
+        </dgm:alg>
+        <dgm:shape xmlns:r="http://schemas.openxmlformats.org/officeDocument/2006/relationships" type="rect" r:blip="">
+          <dgm:adjLst/>
+        </dgm:shape>
+        <dgm:presOf axis="desOrSelf" ptType="node"/>
+        <dgm:constrLst>
+          <dgm:constr type="h" refType="w"/>
+          <dgm:constr type="lMarg" refType="primFontSz" fact="0.1"/>
+          <dgm:constr type="rMarg" refType="primFontSz" fact="0.1"/>
+          <dgm:constr type="tMarg" refType="primFontSz" fact="0.1"/>
+          <dgm:constr type="bMarg" refType="primFontSz" fact="0.1"/>
+        </dgm:constrLst>
+        <dgm:ruleLst>
+          <dgm:rule type="primFontSz" val="5" fact="NaN" max="NaN"/>
+        </dgm:ruleLst>
+      </dgm:layoutNode>
+      <dgm:choose name="Name9">
+        <dgm:if name="Name10" axis="par ch" ptType="doc node" func="cnt" op="gt" val="1">
+          <dgm:forEach name="Name11" axis="followSib" ptType="sibTrans" hideLastTrans="0" cnt="1">
+            <dgm:layoutNode name="sibTrans" styleLbl="node1">
+              <dgm:alg type="conn">
+                <dgm:param type="connRout" val="curve"/>
+                <dgm:param type="begPts" val="radial"/>
+                <dgm:param type="endPts" val="radial"/>
+              </dgm:alg>
+              <dgm:shape xmlns:r="http://schemas.openxmlformats.org/officeDocument/2006/relationships" type="conn" r:blip="">
+                <dgm:adjLst/>
+              </dgm:shape>
+              <dgm:presOf axis="self"/>
+              <dgm:constrLst>
+                <dgm:constr type="h" refType="w" fact="0.65"/>
+                <dgm:constr type="begPad"/>
+                <dgm:constr type="endPad"/>
+              </dgm:constrLst>
+              <dgm:ruleLst/>
+            </dgm:layoutNode>
+          </dgm:forEach>
+        </dgm:if>
+        <dgm:else name="Name12"/>
+      </dgm:choose>
+    </dgm:forEach>
+  </dgm:layoutNode>
+</dgm:layoutDef>
+</file>
+
 <file path=ppt/diagrams/quickStyle1.xml><?xml version="1.0" encoding="utf-8"?>
 <dgm:styleDef xmlns:dgm="http://schemas.openxmlformats.org/drawingml/2006/diagram" xmlns:a="http://schemas.openxmlformats.org/drawingml/2006/main" uniqueId="urn:microsoft.com/office/officeart/2005/8/quickstyle/simple1">
   <dgm:title val=""/>
@@ -4185,6 +5702,1040 @@
 </file>
 
 <file path=ppt/diagrams/quickStyle2.xml><?xml version="1.0" encoding="utf-8"?>
+<dgm:styleDef xmlns:dgm="http://schemas.openxmlformats.org/drawingml/2006/diagram" xmlns:a="http://schemas.openxmlformats.org/drawingml/2006/main" uniqueId="urn:microsoft.com/office/officeart/2005/8/quickstyle/simple1">
+  <dgm:title val=""/>
+  <dgm:desc val=""/>
+  <dgm:catLst>
+    <dgm:cat type="simple" pri="10100"/>
+  </dgm:catLst>
+  <dgm:scene3d>
+    <a:camera prst="orthographicFront"/>
+    <a:lightRig rig="threePt" dir="t"/>
+  </dgm:scene3d>
+  <dgm:styleLbl name="node0">
+    <dgm:scene3d>
+      <a:camera prst="orthographicFront"/>
+      <a:lightRig rig="threePt" dir="t"/>
+    </dgm:scene3d>
+    <dgm:sp3d/>
+    <dgm:txPr/>
+    <dgm:style>
+      <a:lnRef idx="2">
+        <a:scrgbClr r="0" g="0" b="0"/>
+      </a:lnRef>
+      <a:fillRef idx="1">
+        <a:scrgbClr r="0" g="0" b="0"/>
+      </a:fillRef>
+      <a:effectRef idx="0">
+        <a:scrgbClr r="0" g="0" b="0"/>
+      </a:effectRef>
+      <a:fontRef idx="minor">
+        <a:schemeClr val="lt1"/>
+      </a:fontRef>
+    </dgm:style>
+  </dgm:styleLbl>
+  <dgm:styleLbl name="lnNode1">
+    <dgm:scene3d>
+      <a:camera prst="orthographicFront"/>
+      <a:lightRig rig="threePt" dir="t"/>
+    </dgm:scene3d>
+    <dgm:sp3d/>
+    <dgm:txPr/>
+    <dgm:style>
+      <a:lnRef idx="2">
+        <a:scrgbClr r="0" g="0" b="0"/>
+      </a:lnRef>
+      <a:fillRef idx="1">
+        <a:scrgbClr r="0" g="0" b="0"/>
+      </a:fillRef>
+      <a:effectRef idx="0">
+        <a:scrgbClr r="0" g="0" b="0"/>
+      </a:effectRef>
+      <a:fontRef idx="minor">
+        <a:schemeClr val="lt1"/>
+      </a:fontRef>
+    </dgm:style>
+  </dgm:styleLbl>
+  <dgm:styleLbl name="vennNode1">
+    <dgm:scene3d>
+      <a:camera prst="orthographicFront"/>
+      <a:lightRig rig="threePt" dir="t"/>
+    </dgm:scene3d>
+    <dgm:sp3d/>
+    <dgm:txPr/>
+    <dgm:style>
+      <a:lnRef idx="2">
+        <a:scrgbClr r="0" g="0" b="0"/>
+      </a:lnRef>
+      <a:fillRef idx="1">
+        <a:scrgbClr r="0" g="0" b="0"/>
+      </a:fillRef>
+      <a:effectRef idx="0">
+        <a:scrgbClr r="0" g="0" b="0"/>
+      </a:effectRef>
+      <a:fontRef idx="minor">
+        <a:schemeClr val="tx1"/>
+      </a:fontRef>
+    </dgm:style>
+  </dgm:styleLbl>
+  <dgm:styleLbl name="alignNode1">
+    <dgm:scene3d>
+      <a:camera prst="orthographicFront"/>
+      <a:lightRig rig="threePt" dir="t"/>
+    </dgm:scene3d>
+    <dgm:sp3d/>
+    <dgm:txPr/>
+    <dgm:style>
+      <a:lnRef idx="2">
+        <a:scrgbClr r="0" g="0" b="0"/>
+      </a:lnRef>
+      <a:fillRef idx="1">
+        <a:scrgbClr r="0" g="0" b="0"/>
+      </a:fillRef>
+      <a:effectRef idx="0">
+        <a:scrgbClr r="0" g="0" b="0"/>
+      </a:effectRef>
+      <a:fontRef idx="minor">
+        <a:schemeClr val="lt1"/>
+      </a:fontRef>
+    </dgm:style>
+  </dgm:styleLbl>
+  <dgm:styleLbl name="node1">
+    <dgm:scene3d>
+      <a:camera prst="orthographicFront"/>
+      <a:lightRig rig="threePt" dir="t"/>
+    </dgm:scene3d>
+    <dgm:sp3d/>
+    <dgm:txPr/>
+    <dgm:style>
+      <a:lnRef idx="2">
+        <a:scrgbClr r="0" g="0" b="0"/>
+      </a:lnRef>
+      <a:fillRef idx="1">
+        <a:scrgbClr r="0" g="0" b="0"/>
+      </a:fillRef>
+      <a:effectRef idx="0">
+        <a:scrgbClr r="0" g="0" b="0"/>
+      </a:effectRef>
+      <a:fontRef idx="minor">
+        <a:schemeClr val="lt1"/>
+      </a:fontRef>
+    </dgm:style>
+  </dgm:styleLbl>
+  <dgm:styleLbl name="node2">
+    <dgm:scene3d>
+      <a:camera prst="orthographicFront"/>
+      <a:lightRig rig="threePt" dir="t"/>
+    </dgm:scene3d>
+    <dgm:sp3d/>
+    <dgm:txPr/>
+    <dgm:style>
+      <a:lnRef idx="2">
+        <a:scrgbClr r="0" g="0" b="0"/>
+      </a:lnRef>
+      <a:fillRef idx="1">
+        <a:scrgbClr r="0" g="0" b="0"/>
+      </a:fillRef>
+      <a:effectRef idx="0">
+        <a:scrgbClr r="0" g="0" b="0"/>
+      </a:effectRef>
+      <a:fontRef idx="minor">
+        <a:schemeClr val="lt1"/>
+      </a:fontRef>
+    </dgm:style>
+  </dgm:styleLbl>
+  <dgm:styleLbl name="node3">
+    <dgm:scene3d>
+      <a:camera prst="orthographicFront"/>
+      <a:lightRig rig="threePt" dir="t"/>
+    </dgm:scene3d>
+    <dgm:sp3d/>
+    <dgm:txPr/>
+    <dgm:style>
+      <a:lnRef idx="2">
+        <a:scrgbClr r="0" g="0" b="0"/>
+      </a:lnRef>
+      <a:fillRef idx="1">
+        <a:scrgbClr r="0" g="0" b="0"/>
+      </a:fillRef>
+      <a:effectRef idx="0">
+        <a:scrgbClr r="0" g="0" b="0"/>
+      </a:effectRef>
+      <a:fontRef idx="minor">
+        <a:schemeClr val="lt1"/>
+      </a:fontRef>
+    </dgm:style>
+  </dgm:styleLbl>
+  <dgm:styleLbl name="node4">
+    <dgm:scene3d>
+      <a:camera prst="orthographicFront"/>
+      <a:lightRig rig="threePt" dir="t"/>
+    </dgm:scene3d>
+    <dgm:sp3d/>
+    <dgm:txPr/>
+    <dgm:style>
+      <a:lnRef idx="2">
+        <a:scrgbClr r="0" g="0" b="0"/>
+      </a:lnRef>
+      <a:fillRef idx="1">
+        <a:scrgbClr r="0" g="0" b="0"/>
+      </a:fillRef>
+      <a:effectRef idx="0">
+        <a:scrgbClr r="0" g="0" b="0"/>
+      </a:effectRef>
+      <a:fontRef idx="minor">
+        <a:schemeClr val="lt1"/>
+      </a:fontRef>
+    </dgm:style>
+  </dgm:styleLbl>
+  <dgm:styleLbl name="fgImgPlace1">
+    <dgm:scene3d>
+      <a:camera prst="orthographicFront"/>
+      <a:lightRig rig="threePt" dir="t"/>
+    </dgm:scene3d>
+    <dgm:sp3d/>
+    <dgm:txPr/>
+    <dgm:style>
+      <a:lnRef idx="2">
+        <a:scrgbClr r="0" g="0" b="0"/>
+      </a:lnRef>
+      <a:fillRef idx="1">
+        <a:scrgbClr r="0" g="0" b="0"/>
+      </a:fillRef>
+      <a:effectRef idx="0">
+        <a:scrgbClr r="0" g="0" b="0"/>
+      </a:effectRef>
+      <a:fontRef idx="minor"/>
+    </dgm:style>
+  </dgm:styleLbl>
+  <dgm:styleLbl name="alignImgPlace1">
+    <dgm:scene3d>
+      <a:camera prst="orthographicFront"/>
+      <a:lightRig rig="threePt" dir="t"/>
+    </dgm:scene3d>
+    <dgm:sp3d/>
+    <dgm:txPr/>
+    <dgm:style>
+      <a:lnRef idx="2">
+        <a:scrgbClr r="0" g="0" b="0"/>
+      </a:lnRef>
+      <a:fillRef idx="1">
+        <a:scrgbClr r="0" g="0" b="0"/>
+      </a:fillRef>
+      <a:effectRef idx="0">
+        <a:scrgbClr r="0" g="0" b="0"/>
+      </a:effectRef>
+      <a:fontRef idx="minor"/>
+    </dgm:style>
+  </dgm:styleLbl>
+  <dgm:styleLbl name="bgImgPlace1">
+    <dgm:scene3d>
+      <a:camera prst="orthographicFront"/>
+      <a:lightRig rig="threePt" dir="t"/>
+    </dgm:scene3d>
+    <dgm:sp3d/>
+    <dgm:txPr/>
+    <dgm:style>
+      <a:lnRef idx="2">
+        <a:scrgbClr r="0" g="0" b="0"/>
+      </a:lnRef>
+      <a:fillRef idx="1">
+        <a:scrgbClr r="0" g="0" b="0"/>
+      </a:fillRef>
+      <a:effectRef idx="0">
+        <a:scrgbClr r="0" g="0" b="0"/>
+      </a:effectRef>
+      <a:fontRef idx="minor"/>
+    </dgm:style>
+  </dgm:styleLbl>
+  <dgm:styleLbl name="sibTrans2D1">
+    <dgm:scene3d>
+      <a:camera prst="orthographicFront"/>
+      <a:lightRig rig="threePt" dir="t"/>
+    </dgm:scene3d>
+    <dgm:sp3d/>
+    <dgm:txPr/>
+    <dgm:style>
+      <a:lnRef idx="0">
+        <a:scrgbClr r="0" g="0" b="0"/>
+      </a:lnRef>
+      <a:fillRef idx="1">
+        <a:scrgbClr r="0" g="0" b="0"/>
+      </a:fillRef>
+      <a:effectRef idx="0">
+        <a:scrgbClr r="0" g="0" b="0"/>
+      </a:effectRef>
+      <a:fontRef idx="minor">
+        <a:schemeClr val="lt1"/>
+      </a:fontRef>
+    </dgm:style>
+  </dgm:styleLbl>
+  <dgm:styleLbl name="fgSibTrans2D1">
+    <dgm:scene3d>
+      <a:camera prst="orthographicFront"/>
+      <a:lightRig rig="threePt" dir="t"/>
+    </dgm:scene3d>
+    <dgm:sp3d/>
+    <dgm:txPr/>
+    <dgm:style>
+      <a:lnRef idx="0">
+        <a:scrgbClr r="0" g="0" b="0"/>
+      </a:lnRef>
+      <a:fillRef idx="1">
+        <a:scrgbClr r="0" g="0" b="0"/>
+      </a:fillRef>
+      <a:effectRef idx="0">
+        <a:scrgbClr r="0" g="0" b="0"/>
+      </a:effectRef>
+      <a:fontRef idx="minor">
+        <a:schemeClr val="lt1"/>
+      </a:fontRef>
+    </dgm:style>
+  </dgm:styleLbl>
+  <dgm:styleLbl name="bgSibTrans2D1">
+    <dgm:scene3d>
+      <a:camera prst="orthographicFront"/>
+      <a:lightRig rig="threePt" dir="t"/>
+    </dgm:scene3d>
+    <dgm:sp3d/>
+    <dgm:txPr/>
+    <dgm:style>
+      <a:lnRef idx="0">
+        <a:scrgbClr r="0" g="0" b="0"/>
+      </a:lnRef>
+      <a:fillRef idx="1">
+        <a:scrgbClr r="0" g="0" b="0"/>
+      </a:fillRef>
+      <a:effectRef idx="0">
+        <a:scrgbClr r="0" g="0" b="0"/>
+      </a:effectRef>
+      <a:fontRef idx="minor">
+        <a:schemeClr val="lt1"/>
+      </a:fontRef>
+    </dgm:style>
+  </dgm:styleLbl>
+  <dgm:styleLbl name="sibTrans1D1">
+    <dgm:scene3d>
+      <a:camera prst="orthographicFront"/>
+      <a:lightRig rig="threePt" dir="t"/>
+    </dgm:scene3d>
+    <dgm:sp3d/>
+    <dgm:txPr/>
+    <dgm:style>
+      <a:lnRef idx="1">
+        <a:scrgbClr r="0" g="0" b="0"/>
+      </a:lnRef>
+      <a:fillRef idx="0">
+        <a:scrgbClr r="0" g="0" b="0"/>
+      </a:fillRef>
+      <a:effectRef idx="0">
+        <a:scrgbClr r="0" g="0" b="0"/>
+      </a:effectRef>
+      <a:fontRef idx="minor"/>
+    </dgm:style>
+  </dgm:styleLbl>
+  <dgm:styleLbl name="callout">
+    <dgm:scene3d>
+      <a:camera prst="orthographicFront"/>
+      <a:lightRig rig="threePt" dir="t"/>
+    </dgm:scene3d>
+    <dgm:sp3d/>
+    <dgm:txPr/>
+    <dgm:style>
+      <a:lnRef idx="2">
+        <a:scrgbClr r="0" g="0" b="0"/>
+      </a:lnRef>
+      <a:fillRef idx="1">
+        <a:scrgbClr r="0" g="0" b="0"/>
+      </a:fillRef>
+      <a:effectRef idx="0">
+        <a:scrgbClr r="0" g="0" b="0"/>
+      </a:effectRef>
+      <a:fontRef idx="minor"/>
+    </dgm:style>
+  </dgm:styleLbl>
+  <dgm:styleLbl name="asst0">
+    <dgm:scene3d>
+      <a:camera prst="orthographicFront"/>
+      <a:lightRig rig="threePt" dir="t"/>
+    </dgm:scene3d>
+    <dgm:sp3d/>
+    <dgm:txPr/>
+    <dgm:style>
+      <a:lnRef idx="2">
+        <a:scrgbClr r="0" g="0" b="0"/>
+      </a:lnRef>
+      <a:fillRef idx="1">
+        <a:scrgbClr r="0" g="0" b="0"/>
+      </a:fillRef>
+      <a:effectRef idx="0">
+        <a:scrgbClr r="0" g="0" b="0"/>
+      </a:effectRef>
+      <a:fontRef idx="minor">
+        <a:schemeClr val="lt1"/>
+      </a:fontRef>
+    </dgm:style>
+  </dgm:styleLbl>
+  <dgm:styleLbl name="asst1">
+    <dgm:scene3d>
+      <a:camera prst="orthographicFront"/>
+      <a:lightRig rig="threePt" dir="t"/>
+    </dgm:scene3d>
+    <dgm:sp3d/>
+    <dgm:txPr/>
+    <dgm:style>
+      <a:lnRef idx="2">
+        <a:scrgbClr r="0" g="0" b="0"/>
+      </a:lnRef>
+      <a:fillRef idx="1">
+        <a:scrgbClr r="0" g="0" b="0"/>
+      </a:fillRef>
+      <a:effectRef idx="0">
+        <a:scrgbClr r="0" g="0" b="0"/>
+      </a:effectRef>
+      <a:fontRef idx="minor">
+        <a:schemeClr val="lt1"/>
+      </a:fontRef>
+    </dgm:style>
+  </dgm:styleLbl>
+  <dgm:styleLbl name="asst2">
+    <dgm:scene3d>
+      <a:camera prst="orthographicFront"/>
+      <a:lightRig rig="threePt" dir="t"/>
+    </dgm:scene3d>
+    <dgm:sp3d/>
+    <dgm:txPr/>
+    <dgm:style>
+      <a:lnRef idx="2">
+        <a:scrgbClr r="0" g="0" b="0"/>
+      </a:lnRef>
+      <a:fillRef idx="1">
+        <a:scrgbClr r="0" g="0" b="0"/>
+      </a:fillRef>
+      <a:effectRef idx="0">
+        <a:scrgbClr r="0" g="0" b="0"/>
+      </a:effectRef>
+      <a:fontRef idx="minor">
+        <a:schemeClr val="lt1"/>
+      </a:fontRef>
+    </dgm:style>
+  </dgm:styleLbl>
+  <dgm:styleLbl name="asst3">
+    <dgm:scene3d>
+      <a:camera prst="orthographicFront"/>
+      <a:lightRig rig="threePt" dir="t"/>
+    </dgm:scene3d>
+    <dgm:sp3d/>
+    <dgm:txPr/>
+    <dgm:style>
+      <a:lnRef idx="2">
+        <a:scrgbClr r="0" g="0" b="0"/>
+      </a:lnRef>
+      <a:fillRef idx="1">
+        <a:scrgbClr r="0" g="0" b="0"/>
+      </a:fillRef>
+      <a:effectRef idx="0">
+        <a:scrgbClr r="0" g="0" b="0"/>
+      </a:effectRef>
+      <a:fontRef idx="minor">
+        <a:schemeClr val="lt1"/>
+      </a:fontRef>
+    </dgm:style>
+  </dgm:styleLbl>
+  <dgm:styleLbl name="asst4">
+    <dgm:scene3d>
+      <a:camera prst="orthographicFront"/>
+      <a:lightRig rig="threePt" dir="t"/>
+    </dgm:scene3d>
+    <dgm:sp3d/>
+    <dgm:txPr/>
+    <dgm:style>
+      <a:lnRef idx="2">
+        <a:scrgbClr r="0" g="0" b="0"/>
+      </a:lnRef>
+      <a:fillRef idx="1">
+        <a:scrgbClr r="0" g="0" b="0"/>
+      </a:fillRef>
+      <a:effectRef idx="0">
+        <a:scrgbClr r="0" g="0" b="0"/>
+      </a:effectRef>
+      <a:fontRef idx="minor">
+        <a:schemeClr val="lt1"/>
+      </a:fontRef>
+    </dgm:style>
+  </dgm:styleLbl>
+  <dgm:styleLbl name="parChTrans2D1">
+    <dgm:scene3d>
+      <a:camera prst="orthographicFront"/>
+      <a:lightRig rig="threePt" dir="t"/>
+    </dgm:scene3d>
+    <dgm:sp3d/>
+    <dgm:txPr/>
+    <dgm:style>
+      <a:lnRef idx="2">
+        <a:scrgbClr r="0" g="0" b="0"/>
+      </a:lnRef>
+      <a:fillRef idx="1">
+        <a:scrgbClr r="0" g="0" b="0"/>
+      </a:fillRef>
+      <a:effectRef idx="0">
+        <a:scrgbClr r="0" g="0" b="0"/>
+      </a:effectRef>
+      <a:fontRef idx="minor">
+        <a:schemeClr val="lt1"/>
+      </a:fontRef>
+    </dgm:style>
+  </dgm:styleLbl>
+  <dgm:styleLbl name="parChTrans2D2">
+    <dgm:scene3d>
+      <a:camera prst="orthographicFront"/>
+      <a:lightRig rig="threePt" dir="t"/>
+    </dgm:scene3d>
+    <dgm:sp3d/>
+    <dgm:txPr/>
+    <dgm:style>
+      <a:lnRef idx="2">
+        <a:scrgbClr r="0" g="0" b="0"/>
+      </a:lnRef>
+      <a:fillRef idx="1">
+        <a:scrgbClr r="0" g="0" b="0"/>
+      </a:fillRef>
+      <a:effectRef idx="0">
+        <a:scrgbClr r="0" g="0" b="0"/>
+      </a:effectRef>
+      <a:fontRef idx="minor">
+        <a:schemeClr val="lt1"/>
+      </a:fontRef>
+    </dgm:style>
+  </dgm:styleLbl>
+  <dgm:styleLbl name="parChTrans2D3">
+    <dgm:scene3d>
+      <a:camera prst="orthographicFront"/>
+      <a:lightRig rig="threePt" dir="t"/>
+    </dgm:scene3d>
+    <dgm:sp3d/>
+    <dgm:txPr/>
+    <dgm:style>
+      <a:lnRef idx="2">
+        <a:scrgbClr r="0" g="0" b="0"/>
+      </a:lnRef>
+      <a:fillRef idx="1">
+        <a:scrgbClr r="0" g="0" b="0"/>
+      </a:fillRef>
+      <a:effectRef idx="0">
+        <a:scrgbClr r="0" g="0" b="0"/>
+      </a:effectRef>
+      <a:fontRef idx="minor">
+        <a:schemeClr val="lt1"/>
+      </a:fontRef>
+    </dgm:style>
+  </dgm:styleLbl>
+  <dgm:styleLbl name="parChTrans2D4">
+    <dgm:scene3d>
+      <a:camera prst="orthographicFront"/>
+      <a:lightRig rig="threePt" dir="t"/>
+    </dgm:scene3d>
+    <dgm:sp3d/>
+    <dgm:txPr/>
+    <dgm:style>
+      <a:lnRef idx="2">
+        <a:scrgbClr r="0" g="0" b="0"/>
+      </a:lnRef>
+      <a:fillRef idx="1">
+        <a:scrgbClr r="0" g="0" b="0"/>
+      </a:fillRef>
+      <a:effectRef idx="0">
+        <a:scrgbClr r="0" g="0" b="0"/>
+      </a:effectRef>
+      <a:fontRef idx="minor">
+        <a:schemeClr val="lt1"/>
+      </a:fontRef>
+    </dgm:style>
+  </dgm:styleLbl>
+  <dgm:styleLbl name="parChTrans1D1">
+    <dgm:scene3d>
+      <a:camera prst="orthographicFront"/>
+      <a:lightRig rig="threePt" dir="t"/>
+    </dgm:scene3d>
+    <dgm:sp3d/>
+    <dgm:txPr/>
+    <dgm:style>
+      <a:lnRef idx="2">
+        <a:scrgbClr r="0" g="0" b="0"/>
+      </a:lnRef>
+      <a:fillRef idx="0">
+        <a:scrgbClr r="0" g="0" b="0"/>
+      </a:fillRef>
+      <a:effectRef idx="0">
+        <a:scrgbClr r="0" g="0" b="0"/>
+      </a:effectRef>
+      <a:fontRef idx="minor"/>
+    </dgm:style>
+  </dgm:styleLbl>
+  <dgm:styleLbl name="parChTrans1D2">
+    <dgm:scene3d>
+      <a:camera prst="orthographicFront"/>
+      <a:lightRig rig="threePt" dir="t"/>
+    </dgm:scene3d>
+    <dgm:sp3d/>
+    <dgm:txPr/>
+    <dgm:style>
+      <a:lnRef idx="2">
+        <a:scrgbClr r="0" g="0" b="0"/>
+      </a:lnRef>
+      <a:fillRef idx="0">
+        <a:scrgbClr r="0" g="0" b="0"/>
+      </a:fillRef>
+      <a:effectRef idx="0">
+        <a:scrgbClr r="0" g="0" b="0"/>
+      </a:effectRef>
+      <a:fontRef idx="minor"/>
+    </dgm:style>
+  </dgm:styleLbl>
+  <dgm:styleLbl name="parChTrans1D3">
+    <dgm:scene3d>
+      <a:camera prst="orthographicFront"/>
+      <a:lightRig rig="threePt" dir="t"/>
+    </dgm:scene3d>
+    <dgm:sp3d/>
+    <dgm:txPr/>
+    <dgm:style>
+      <a:lnRef idx="2">
+        <a:scrgbClr r="0" g="0" b="0"/>
+      </a:lnRef>
+      <a:fillRef idx="0">
+        <a:scrgbClr r="0" g="0" b="0"/>
+      </a:fillRef>
+      <a:effectRef idx="0">
+        <a:scrgbClr r="0" g="0" b="0"/>
+      </a:effectRef>
+      <a:fontRef idx="minor"/>
+    </dgm:style>
+  </dgm:styleLbl>
+  <dgm:styleLbl name="parChTrans1D4">
+    <dgm:scene3d>
+      <a:camera prst="orthographicFront"/>
+      <a:lightRig rig="threePt" dir="t"/>
+    </dgm:scene3d>
+    <dgm:sp3d/>
+    <dgm:txPr/>
+    <dgm:style>
+      <a:lnRef idx="2">
+        <a:scrgbClr r="0" g="0" b="0"/>
+      </a:lnRef>
+      <a:fillRef idx="0">
+        <a:scrgbClr r="0" g="0" b="0"/>
+      </a:fillRef>
+      <a:effectRef idx="0">
+        <a:scrgbClr r="0" g="0" b="0"/>
+      </a:effectRef>
+      <a:fontRef idx="minor"/>
+    </dgm:style>
+  </dgm:styleLbl>
+  <dgm:styleLbl name="fgAcc1">
+    <dgm:scene3d>
+      <a:camera prst="orthographicFront"/>
+      <a:lightRig rig="threePt" dir="t"/>
+    </dgm:scene3d>
+    <dgm:sp3d/>
+    <dgm:txPr/>
+    <dgm:style>
+      <a:lnRef idx="2">
+        <a:scrgbClr r="0" g="0" b="0"/>
+      </a:lnRef>
+      <a:fillRef idx="1">
+        <a:scrgbClr r="0" g="0" b="0"/>
+      </a:fillRef>
+      <a:effectRef idx="0">
+        <a:scrgbClr r="0" g="0" b="0"/>
+      </a:effectRef>
+      <a:fontRef idx="minor"/>
+    </dgm:style>
+  </dgm:styleLbl>
+  <dgm:styleLbl name="conFgAcc1">
+    <dgm:scene3d>
+      <a:camera prst="orthographicFront"/>
+      <a:lightRig rig="threePt" dir="t"/>
+    </dgm:scene3d>
+    <dgm:sp3d/>
+    <dgm:txPr/>
+    <dgm:style>
+      <a:lnRef idx="2">
+        <a:scrgbClr r="0" g="0" b="0"/>
+      </a:lnRef>
+      <a:fillRef idx="1">
+        <a:scrgbClr r="0" g="0" b="0"/>
+      </a:fillRef>
+      <a:effectRef idx="0">
+        <a:scrgbClr r="0" g="0" b="0"/>
+      </a:effectRef>
+      <a:fontRef idx="minor"/>
+    </dgm:style>
+  </dgm:styleLbl>
+  <dgm:styleLbl name="alignAcc1">
+    <dgm:scene3d>
+      <a:camera prst="orthographicFront"/>
+      <a:lightRig rig="threePt" dir="t"/>
+    </dgm:scene3d>
+    <dgm:sp3d/>
+    <dgm:txPr/>
+    <dgm:style>
+      <a:lnRef idx="2">
+        <a:scrgbClr r="0" g="0" b="0"/>
+      </a:lnRef>
+      <a:fillRef idx="1">
+        <a:scrgbClr r="0" g="0" b="0"/>
+      </a:fillRef>
+      <a:effectRef idx="0">
+        <a:scrgbClr r="0" g="0" b="0"/>
+      </a:effectRef>
+      <a:fontRef idx="minor"/>
+    </dgm:style>
+  </dgm:styleLbl>
+  <dgm:styleLbl name="trAlignAcc1">
+    <dgm:scene3d>
+      <a:camera prst="orthographicFront"/>
+      <a:lightRig rig="threePt" dir="t"/>
+    </dgm:scene3d>
+    <dgm:sp3d/>
+    <dgm:txPr/>
+    <dgm:style>
+      <a:lnRef idx="1">
+        <a:scrgbClr r="0" g="0" b="0"/>
+      </a:lnRef>
+      <a:fillRef idx="1">
+        <a:scrgbClr r="0" g="0" b="0"/>
+      </a:fillRef>
+      <a:effectRef idx="0">
+        <a:scrgbClr r="0" g="0" b="0"/>
+      </a:effectRef>
+      <a:fontRef idx="minor"/>
+    </dgm:style>
+  </dgm:styleLbl>
+  <dgm:styleLbl name="bgAcc1">
+    <dgm:scene3d>
+      <a:camera prst="orthographicFront"/>
+      <a:lightRig rig="threePt" dir="t"/>
+    </dgm:scene3d>
+    <dgm:sp3d/>
+    <dgm:txPr/>
+    <dgm:style>
+      <a:lnRef idx="2">
+        <a:scrgbClr r="0" g="0" b="0"/>
+      </a:lnRef>
+      <a:fillRef idx="1">
+        <a:scrgbClr r="0" g="0" b="0"/>
+      </a:fillRef>
+      <a:effectRef idx="0">
+        <a:scrgbClr r="0" g="0" b="0"/>
+      </a:effectRef>
+      <a:fontRef idx="minor"/>
+    </dgm:style>
+  </dgm:styleLbl>
+  <dgm:styleLbl name="solidFgAcc1">
+    <dgm:scene3d>
+      <a:camera prst="orthographicFront"/>
+      <a:lightRig rig="threePt" dir="t"/>
+    </dgm:scene3d>
+    <dgm:sp3d/>
+    <dgm:txPr/>
+    <dgm:style>
+      <a:lnRef idx="2">
+        <a:scrgbClr r="0" g="0" b="0"/>
+      </a:lnRef>
+      <a:fillRef idx="1">
+        <a:scrgbClr r="0" g="0" b="0"/>
+      </a:fillRef>
+      <a:effectRef idx="0">
+        <a:scrgbClr r="0" g="0" b="0"/>
+      </a:effectRef>
+      <a:fontRef idx="minor"/>
+    </dgm:style>
+  </dgm:styleLbl>
+  <dgm:styleLbl name="solidAlignAcc1">
+    <dgm:scene3d>
+      <a:camera prst="orthographicFront"/>
+      <a:lightRig rig="threePt" dir="t"/>
+    </dgm:scene3d>
+    <dgm:sp3d/>
+    <dgm:txPr/>
+    <dgm:style>
+      <a:lnRef idx="2">
+        <a:scrgbClr r="0" g="0" b="0"/>
+      </a:lnRef>
+      <a:fillRef idx="1">
+        <a:scrgbClr r="0" g="0" b="0"/>
+      </a:fillRef>
+      <a:effectRef idx="0">
+        <a:scrgbClr r="0" g="0" b="0"/>
+      </a:effectRef>
+      <a:fontRef idx="minor"/>
+    </dgm:style>
+  </dgm:styleLbl>
+  <dgm:styleLbl name="solidBgAcc1">
+    <dgm:scene3d>
+      <a:camera prst="orthographicFront"/>
+      <a:lightRig rig="threePt" dir="t"/>
+    </dgm:scene3d>
+    <dgm:sp3d/>
+    <dgm:txPr/>
+    <dgm:style>
+      <a:lnRef idx="2">
+        <a:scrgbClr r="0" g="0" b="0"/>
+      </a:lnRef>
+      <a:fillRef idx="1">
+        <a:scrgbClr r="0" g="0" b="0"/>
+      </a:fillRef>
+      <a:effectRef idx="0">
+        <a:scrgbClr r="0" g="0" b="0"/>
+      </a:effectRef>
+      <a:fontRef idx="minor"/>
+    </dgm:style>
+  </dgm:styleLbl>
+  <dgm:styleLbl name="fgAccFollowNode1">
+    <dgm:scene3d>
+      <a:camera prst="orthographicFront"/>
+      <a:lightRig rig="threePt" dir="t"/>
+    </dgm:scene3d>
+    <dgm:sp3d/>
+    <dgm:txPr/>
+    <dgm:style>
+      <a:lnRef idx="2">
+        <a:scrgbClr r="0" g="0" b="0"/>
+      </a:lnRef>
+      <a:fillRef idx="1">
+        <a:scrgbClr r="0" g="0" b="0"/>
+      </a:fillRef>
+      <a:effectRef idx="0">
+        <a:scrgbClr r="0" g="0" b="0"/>
+      </a:effectRef>
+      <a:fontRef idx="minor"/>
+    </dgm:style>
+  </dgm:styleLbl>
+  <dgm:styleLbl name="alignAccFollowNode1">
+    <dgm:scene3d>
+      <a:camera prst="orthographicFront"/>
+      <a:lightRig rig="threePt" dir="t"/>
+    </dgm:scene3d>
+    <dgm:sp3d/>
+    <dgm:txPr/>
+    <dgm:style>
+      <a:lnRef idx="2">
+        <a:scrgbClr r="0" g="0" b="0"/>
+      </a:lnRef>
+      <a:fillRef idx="1">
+        <a:scrgbClr r="0" g="0" b="0"/>
+      </a:fillRef>
+      <a:effectRef idx="0">
+        <a:scrgbClr r="0" g="0" b="0"/>
+      </a:effectRef>
+      <a:fontRef idx="minor"/>
+    </dgm:style>
+  </dgm:styleLbl>
+  <dgm:styleLbl name="bgAccFollowNode1">
+    <dgm:scene3d>
+      <a:camera prst="orthographicFront"/>
+      <a:lightRig rig="threePt" dir="t"/>
+    </dgm:scene3d>
+    <dgm:sp3d/>
+    <dgm:txPr/>
+    <dgm:style>
+      <a:lnRef idx="2">
+        <a:scrgbClr r="0" g="0" b="0"/>
+      </a:lnRef>
+      <a:fillRef idx="1">
+        <a:scrgbClr r="0" g="0" b="0"/>
+      </a:fillRef>
+      <a:effectRef idx="0">
+        <a:scrgbClr r="0" g="0" b="0"/>
+      </a:effectRef>
+      <a:fontRef idx="minor"/>
+    </dgm:style>
+  </dgm:styleLbl>
+  <dgm:styleLbl name="fgAcc0">
+    <dgm:scene3d>
+      <a:camera prst="orthographicFront"/>
+      <a:lightRig rig="threePt" dir="t"/>
+    </dgm:scene3d>
+    <dgm:sp3d/>
+    <dgm:txPr/>
+    <dgm:style>
+      <a:lnRef idx="2">
+        <a:scrgbClr r="0" g="0" b="0"/>
+      </a:lnRef>
+      <a:fillRef idx="1">
+        <a:scrgbClr r="0" g="0" b="0"/>
+      </a:fillRef>
+      <a:effectRef idx="0">
+        <a:scrgbClr r="0" g="0" b="0"/>
+      </a:effectRef>
+      <a:fontRef idx="minor"/>
+    </dgm:style>
+  </dgm:styleLbl>
+  <dgm:styleLbl name="fgAcc2">
+    <dgm:scene3d>
+      <a:camera prst="orthographicFront"/>
+      <a:lightRig rig="threePt" dir="t"/>
+    </dgm:scene3d>
+    <dgm:sp3d/>
+    <dgm:txPr/>
+    <dgm:style>
+      <a:lnRef idx="2">
+        <a:scrgbClr r="0" g="0" b="0"/>
+      </a:lnRef>
+      <a:fillRef idx="1">
+        <a:scrgbClr r="0" g="0" b="0"/>
+      </a:fillRef>
+      <a:effectRef idx="0">
+        <a:scrgbClr r="0" g="0" b="0"/>
+      </a:effectRef>
+      <a:fontRef idx="minor"/>
+    </dgm:style>
+  </dgm:styleLbl>
+  <dgm:styleLbl name="fgAcc3">
+    <dgm:scene3d>
+      <a:camera prst="orthographicFront"/>
+      <a:lightRig rig="threePt" dir="t"/>
+    </dgm:scene3d>
+    <dgm:sp3d/>
+    <dgm:txPr/>
+    <dgm:style>
+      <a:lnRef idx="2">
+        <a:scrgbClr r="0" g="0" b="0"/>
+      </a:lnRef>
+      <a:fillRef idx="1">
+        <a:scrgbClr r="0" g="0" b="0"/>
+      </a:fillRef>
+      <a:effectRef idx="0">
+        <a:scrgbClr r="0" g="0" b="0"/>
+      </a:effectRef>
+      <a:fontRef idx="minor"/>
+    </dgm:style>
+  </dgm:styleLbl>
+  <dgm:styleLbl name="fgAcc4">
+    <dgm:scene3d>
+      <a:camera prst="orthographicFront"/>
+      <a:lightRig rig="threePt" dir="t"/>
+    </dgm:scene3d>
+    <dgm:sp3d/>
+    <dgm:txPr/>
+    <dgm:style>
+      <a:lnRef idx="2">
+        <a:scrgbClr r="0" g="0" b="0"/>
+      </a:lnRef>
+      <a:fillRef idx="1">
+        <a:scrgbClr r="0" g="0" b="0"/>
+      </a:fillRef>
+      <a:effectRef idx="0">
+        <a:scrgbClr r="0" g="0" b="0"/>
+      </a:effectRef>
+      <a:fontRef idx="minor"/>
+    </dgm:style>
+  </dgm:styleLbl>
+  <dgm:styleLbl name="bgShp">
+    <dgm:scene3d>
+      <a:camera prst="orthographicFront"/>
+      <a:lightRig rig="threePt" dir="t"/>
+    </dgm:scene3d>
+    <dgm:sp3d/>
+    <dgm:txPr/>
+    <dgm:style>
+      <a:lnRef idx="0">
+        <a:scrgbClr r="0" g="0" b="0"/>
+      </a:lnRef>
+      <a:fillRef idx="1">
+        <a:scrgbClr r="0" g="0" b="0"/>
+      </a:fillRef>
+      <a:effectRef idx="0">
+        <a:scrgbClr r="0" g="0" b="0"/>
+      </a:effectRef>
+      <a:fontRef idx="minor"/>
+    </dgm:style>
+  </dgm:styleLbl>
+  <dgm:styleLbl name="dkBgShp">
+    <dgm:scene3d>
+      <a:camera prst="orthographicFront"/>
+      <a:lightRig rig="threePt" dir="t"/>
+    </dgm:scene3d>
+    <dgm:sp3d/>
+    <dgm:txPr/>
+    <dgm:style>
+      <a:lnRef idx="0">
+        <a:scrgbClr r="0" g="0" b="0"/>
+      </a:lnRef>
+      <a:fillRef idx="1">
+        <a:scrgbClr r="0" g="0" b="0"/>
+      </a:fillRef>
+      <a:effectRef idx="0">
+        <a:scrgbClr r="0" g="0" b="0"/>
+      </a:effectRef>
+      <a:fontRef idx="minor"/>
+    </dgm:style>
+  </dgm:styleLbl>
+  <dgm:styleLbl name="trBgShp">
+    <dgm:scene3d>
+      <a:camera prst="orthographicFront"/>
+      <a:lightRig rig="threePt" dir="t"/>
+    </dgm:scene3d>
+    <dgm:sp3d/>
+    <dgm:txPr/>
+    <dgm:style>
+      <a:lnRef idx="0">
+        <a:scrgbClr r="0" g="0" b="0"/>
+      </a:lnRef>
+      <a:fillRef idx="1">
+        <a:scrgbClr r="0" g="0" b="0"/>
+      </a:fillRef>
+      <a:effectRef idx="0">
+        <a:scrgbClr r="0" g="0" b="0"/>
+      </a:effectRef>
+      <a:fontRef idx="minor"/>
+    </dgm:style>
+  </dgm:styleLbl>
+  <dgm:styleLbl name="fgShp">
+    <dgm:scene3d>
+      <a:camera prst="orthographicFront"/>
+      <a:lightRig rig="threePt" dir="t"/>
+    </dgm:scene3d>
+    <dgm:sp3d/>
+    <dgm:txPr/>
+    <dgm:style>
+      <a:lnRef idx="2">
+        <a:scrgbClr r="0" g="0" b="0"/>
+      </a:lnRef>
+      <a:fillRef idx="1">
+        <a:scrgbClr r="0" g="0" b="0"/>
+      </a:fillRef>
+      <a:effectRef idx="0">
+        <a:scrgbClr r="0" g="0" b="0"/>
+      </a:effectRef>
+      <a:fontRef idx="minor"/>
+    </dgm:style>
+  </dgm:styleLbl>
+  <dgm:styleLbl name="revTx">
+    <dgm:scene3d>
+      <a:camera prst="orthographicFront"/>
+      <a:lightRig rig="threePt" dir="t"/>
+    </dgm:scene3d>
+    <dgm:sp3d/>
+    <dgm:txPr/>
+    <dgm:style>
+      <a:lnRef idx="0">
+        <a:scrgbClr r="0" g="0" b="0"/>
+      </a:lnRef>
+      <a:fillRef idx="0">
+        <a:scrgbClr r="0" g="0" b="0"/>
+      </a:fillRef>
+      <a:effectRef idx="0">
+        <a:scrgbClr r="0" g="0" b="0"/>
+      </a:effectRef>
+      <a:fontRef idx="minor"/>
+    </dgm:style>
+  </dgm:styleLbl>
+</dgm:styleDef>
+</file>
+
+<file path=ppt/diagrams/quickStyle3.xml><?xml version="1.0" encoding="utf-8"?>
 <dgm:styleDef xmlns:dgm="http://schemas.openxmlformats.org/drawingml/2006/diagram" xmlns:a="http://schemas.openxmlformats.org/drawingml/2006/main" uniqueId="urn:microsoft.com/office/officeart/2005/8/quickstyle/simple1">
   <dgm:title val=""/>
   <dgm:desc val=""/>
@@ -5365,7 +7916,7 @@
           <a:p>
             <a:fld id="{0A001B99-3F92-7842-9C73-C69829A98653}" type="datetimeFigureOut">
               <a:rPr lang="en-US" smtClean="0"/>
-              <a:t>2/22/23</a:t>
+              <a:t>5/9/23</a:t>
             </a:fld>
             <a:endParaRPr lang="en-US"/>
           </a:p>
@@ -5563,7 +8114,7 @@
           <a:p>
             <a:fld id="{0A001B99-3F92-7842-9C73-C69829A98653}" type="datetimeFigureOut">
               <a:rPr lang="en-US" smtClean="0"/>
-              <a:t>2/22/23</a:t>
+              <a:t>5/9/23</a:t>
             </a:fld>
             <a:endParaRPr lang="en-US"/>
           </a:p>
@@ -5771,7 +8322,7 @@
           <a:p>
             <a:fld id="{0A001B99-3F92-7842-9C73-C69829A98653}" type="datetimeFigureOut">
               <a:rPr lang="en-US" smtClean="0"/>
-              <a:t>2/22/23</a:t>
+              <a:t>5/9/23</a:t>
             </a:fld>
             <a:endParaRPr lang="en-US"/>
           </a:p>
@@ -5969,7 +8520,7 @@
           <a:p>
             <a:fld id="{0A001B99-3F92-7842-9C73-C69829A98653}" type="datetimeFigureOut">
               <a:rPr lang="en-US" smtClean="0"/>
-              <a:t>2/22/23</a:t>
+              <a:t>5/9/23</a:t>
             </a:fld>
             <a:endParaRPr lang="en-US"/>
           </a:p>
@@ -6244,7 +8795,7 @@
           <a:p>
             <a:fld id="{0A001B99-3F92-7842-9C73-C69829A98653}" type="datetimeFigureOut">
               <a:rPr lang="en-US" smtClean="0"/>
-              <a:t>2/22/23</a:t>
+              <a:t>5/9/23</a:t>
             </a:fld>
             <a:endParaRPr lang="en-US"/>
           </a:p>
@@ -6509,7 +9060,7 @@
           <a:p>
             <a:fld id="{0A001B99-3F92-7842-9C73-C69829A98653}" type="datetimeFigureOut">
               <a:rPr lang="en-US" smtClean="0"/>
-              <a:t>2/22/23</a:t>
+              <a:t>5/9/23</a:t>
             </a:fld>
             <a:endParaRPr lang="en-US"/>
           </a:p>
@@ -6921,7 +9472,7 @@
           <a:p>
             <a:fld id="{0A001B99-3F92-7842-9C73-C69829A98653}" type="datetimeFigureOut">
               <a:rPr lang="en-US" smtClean="0"/>
-              <a:t>2/22/23</a:t>
+              <a:t>5/9/23</a:t>
             </a:fld>
             <a:endParaRPr lang="en-US"/>
           </a:p>
@@ -7062,7 +9613,7 @@
           <a:p>
             <a:fld id="{0A001B99-3F92-7842-9C73-C69829A98653}" type="datetimeFigureOut">
               <a:rPr lang="en-US" smtClean="0"/>
-              <a:t>2/22/23</a:t>
+              <a:t>5/9/23</a:t>
             </a:fld>
             <a:endParaRPr lang="en-US"/>
           </a:p>
@@ -7175,7 +9726,7 @@
           <a:p>
             <a:fld id="{0A001B99-3F92-7842-9C73-C69829A98653}" type="datetimeFigureOut">
               <a:rPr lang="en-US" smtClean="0"/>
-              <a:t>2/22/23</a:t>
+              <a:t>5/9/23</a:t>
             </a:fld>
             <a:endParaRPr lang="en-US"/>
           </a:p>
@@ -7486,7 +10037,7 @@
           <a:p>
             <a:fld id="{0A001B99-3F92-7842-9C73-C69829A98653}" type="datetimeFigureOut">
               <a:rPr lang="en-US" smtClean="0"/>
-              <a:t>2/22/23</a:t>
+              <a:t>5/9/23</a:t>
             </a:fld>
             <a:endParaRPr lang="en-US"/>
           </a:p>
@@ -7774,7 +10325,7 @@
           <a:p>
             <a:fld id="{0A001B99-3F92-7842-9C73-C69829A98653}" type="datetimeFigureOut">
               <a:rPr lang="en-US" smtClean="0"/>
-              <a:t>2/22/23</a:t>
+              <a:t>5/9/23</a:t>
             </a:fld>
             <a:endParaRPr lang="en-US"/>
           </a:p>
@@ -8015,7 +10566,7 @@
           <a:p>
             <a:fld id="{0A001B99-3F92-7842-9C73-C69829A98653}" type="datetimeFigureOut">
               <a:rPr lang="en-US" smtClean="0"/>
-              <a:t>2/22/23</a:t>
+              <a:t>5/9/23</a:t>
             </a:fld>
             <a:endParaRPr lang="en-US"/>
           </a:p>
@@ -8803,6 +11354,198 @@
 </p:sld>
 </file>
 
+<file path=ppt/slides/slide3.xml><?xml version="1.0" encoding="utf-8"?>
+<p:sld xmlns:a="http://schemas.openxmlformats.org/drawingml/2006/main" xmlns:r="http://schemas.openxmlformats.org/officeDocument/2006/relationships" xmlns:p="http://schemas.openxmlformats.org/presentationml/2006/main">
+  <p:cSld>
+    <p:spTree>
+      <p:nvGrpSpPr>
+        <p:cNvPr id="1" name=""/>
+        <p:cNvGrpSpPr/>
+        <p:nvPr/>
+      </p:nvGrpSpPr>
+      <p:grpSpPr>
+        <a:xfrm>
+          <a:off x="0" y="0"/>
+          <a:ext cx="0" cy="0"/>
+          <a:chOff x="0" y="0"/>
+          <a:chExt cx="0" cy="0"/>
+        </a:xfrm>
+      </p:grpSpPr>
+      <p:grpSp>
+        <p:nvGrpSpPr>
+          <p:cNvPr id="4" name="Group 3">
+            <a:extLst>
+              <a:ext uri="{FF2B5EF4-FFF2-40B4-BE49-F238E27FC236}">
+                <a16:creationId xmlns:a16="http://schemas.microsoft.com/office/drawing/2014/main" id="{AB5CEE35-4352-8D45-8C71-330B09DAAACC}"/>
+              </a:ext>
+            </a:extLst>
+          </p:cNvPr>
+          <p:cNvGrpSpPr/>
+          <p:nvPr/>
+        </p:nvGrpSpPr>
+        <p:grpSpPr>
+          <a:xfrm>
+            <a:off x="4764168" y="1493800"/>
+            <a:ext cx="6161461" cy="4107641"/>
+            <a:chOff x="4764168" y="1493800"/>
+            <a:chExt cx="6161461" cy="4107641"/>
+          </a:xfrm>
+          <a:solidFill>
+            <a:schemeClr val="accent2">
+              <a:lumMod val="50000"/>
+            </a:schemeClr>
+          </a:solidFill>
+        </p:grpSpPr>
+        <p:graphicFrame>
+          <p:nvGraphicFramePr>
+            <p:cNvPr id="5" name="Diagram 4">
+              <a:extLst>
+                <a:ext uri="{FF2B5EF4-FFF2-40B4-BE49-F238E27FC236}">
+                  <a16:creationId xmlns:a16="http://schemas.microsoft.com/office/drawing/2014/main" id="{FA690F96-9987-3D48-ABA7-13689AB62CC6}"/>
+                </a:ext>
+              </a:extLst>
+            </p:cNvPr>
+            <p:cNvGraphicFramePr/>
+            <p:nvPr>
+              <p:extLst>
+                <p:ext uri="{D42A27DB-BD31-4B8C-83A1-F6EECF244321}">
+                  <p14:modId xmlns:p14="http://schemas.microsoft.com/office/powerpoint/2010/main" val="962600702"/>
+                </p:ext>
+              </p:extLst>
+            </p:nvPr>
+          </p:nvGraphicFramePr>
+          <p:xfrm>
+            <a:off x="4764168" y="1493800"/>
+            <a:ext cx="6161461" cy="4107641"/>
+          </p:xfrm>
+          <a:graphic>
+            <a:graphicData uri="http://schemas.openxmlformats.org/drawingml/2006/diagram">
+              <dgm:relIds xmlns:dgm="http://schemas.openxmlformats.org/drawingml/2006/diagram" xmlns:r="http://schemas.openxmlformats.org/officeDocument/2006/relationships" r:dm="rId2" r:lo="rId3" r:qs="rId4" r:cs="rId5"/>
+            </a:graphicData>
+          </a:graphic>
+        </p:graphicFrame>
+        <p:pic>
+          <p:nvPicPr>
+            <p:cNvPr id="6" name="Graphic 5" descr="Cow outline">
+              <a:extLst>
+                <a:ext uri="{FF2B5EF4-FFF2-40B4-BE49-F238E27FC236}">
+                  <a16:creationId xmlns:a16="http://schemas.microsoft.com/office/drawing/2014/main" id="{264284DA-1376-9047-A9F1-716C03B51D1E}"/>
+                </a:ext>
+              </a:extLst>
+            </p:cNvPr>
+            <p:cNvPicPr>
+              <a:picLocks noChangeAspect="1"/>
+            </p:cNvPicPr>
+            <p:nvPr/>
+          </p:nvPicPr>
+          <p:blipFill>
+            <a:blip r:embed="rId7">
+              <a:extLst>
+                <a:ext uri="{96DAC541-7B7A-43D3-8B79-37D633B846F1}">
+                  <asvg:svgBlip xmlns:asvg="http://schemas.microsoft.com/office/drawing/2016/SVG/main" r:embed="rId8"/>
+                </a:ext>
+              </a:extLst>
+            </a:blip>
+            <a:stretch>
+              <a:fillRect/>
+            </a:stretch>
+          </p:blipFill>
+          <p:spPr>
+            <a:xfrm>
+              <a:off x="8679542" y="1913329"/>
+              <a:ext cx="1313543" cy="1313543"/>
+            </a:xfrm>
+            <a:prstGeom prst="rect">
+              <a:avLst/>
+            </a:prstGeom>
+          </p:spPr>
+        </p:pic>
+        <p:pic>
+          <p:nvPicPr>
+            <p:cNvPr id="7" name="Graphic 6" descr="Lion outline">
+              <a:extLst>
+                <a:ext uri="{FF2B5EF4-FFF2-40B4-BE49-F238E27FC236}">
+                  <a16:creationId xmlns:a16="http://schemas.microsoft.com/office/drawing/2014/main" id="{1AC4E751-5139-9840-AD69-AE4CCC124D0E}"/>
+                </a:ext>
+              </a:extLst>
+            </p:cNvPr>
+            <p:cNvPicPr>
+              <a:picLocks noChangeAspect="1"/>
+            </p:cNvPicPr>
+            <p:nvPr/>
+          </p:nvPicPr>
+          <p:blipFill>
+            <a:blip r:embed="rId9">
+              <a:extLst>
+                <a:ext uri="{96DAC541-7B7A-43D3-8B79-37D633B846F1}">
+                  <asvg:svgBlip xmlns:asvg="http://schemas.microsoft.com/office/drawing/2016/SVG/main" r:embed="rId10"/>
+                </a:ext>
+              </a:extLst>
+            </a:blip>
+            <a:stretch>
+              <a:fillRect/>
+            </a:stretch>
+          </p:blipFill>
+          <p:spPr>
+            <a:xfrm>
+              <a:off x="7188126" y="4287898"/>
+              <a:ext cx="1313543" cy="1313543"/>
+            </a:xfrm>
+            <a:prstGeom prst="rect">
+              <a:avLst/>
+            </a:prstGeom>
+          </p:spPr>
+        </p:pic>
+        <p:pic>
+          <p:nvPicPr>
+            <p:cNvPr id="8" name="Graphic 7" descr="Group of men outline">
+              <a:extLst>
+                <a:ext uri="{FF2B5EF4-FFF2-40B4-BE49-F238E27FC236}">
+                  <a16:creationId xmlns:a16="http://schemas.microsoft.com/office/drawing/2014/main" id="{7EF99D0E-E8A2-DB49-A128-D51B2B9BD8C8}"/>
+                </a:ext>
+              </a:extLst>
+            </p:cNvPr>
+            <p:cNvPicPr>
+              <a:picLocks noChangeAspect="1"/>
+            </p:cNvPicPr>
+            <p:nvPr/>
+          </p:nvPicPr>
+          <p:blipFill>
+            <a:blip r:embed="rId11">
+              <a:extLst>
+                <a:ext uri="{96DAC541-7B7A-43D3-8B79-37D633B846F1}">
+                  <asvg:svgBlip xmlns:asvg="http://schemas.microsoft.com/office/drawing/2016/SVG/main" r:embed="rId12"/>
+                </a:ext>
+              </a:extLst>
+            </a:blip>
+            <a:stretch>
+              <a:fillRect/>
+            </a:stretch>
+          </p:blipFill>
+          <p:spPr>
+            <a:xfrm>
+              <a:off x="5874583" y="1913330"/>
+              <a:ext cx="1313543" cy="1313543"/>
+            </a:xfrm>
+            <a:prstGeom prst="rect">
+              <a:avLst/>
+            </a:prstGeom>
+          </p:spPr>
+        </p:pic>
+      </p:grpSp>
+    </p:spTree>
+    <p:extLst>
+      <p:ext uri="{BB962C8B-B14F-4D97-AF65-F5344CB8AC3E}">
+        <p14:creationId xmlns:p14="http://schemas.microsoft.com/office/powerpoint/2010/main" val="1420587229"/>
+      </p:ext>
+    </p:extLst>
+  </p:cSld>
+  <p:clrMapOvr>
+    <a:masterClrMapping/>
+  </p:clrMapOvr>
+</p:sld>
+</file>
+
 <file path=ppt/theme/theme1.xml><?xml version="1.0" encoding="utf-8"?>
 <a:theme xmlns:a="http://schemas.openxmlformats.org/drawingml/2006/main" name="Office Theme">
   <a:themeElements>
